--- a/年度回顾.pptx
+++ b/年度回顾.pptx
@@ -7,21 +7,13 @@
   <p:sldIdLst>
     <p:sldId id="256" r:id="rId2"/>
     <p:sldId id="257" r:id="rId3"/>
-    <p:sldId id="261" r:id="rId4"/>
-    <p:sldId id="258" r:id="rId5"/>
-    <p:sldId id="262" r:id="rId6"/>
-    <p:sldId id="259" r:id="rId7"/>
-    <p:sldId id="263" r:id="rId8"/>
-    <p:sldId id="260" r:id="rId9"/>
-    <p:sldId id="264" r:id="rId10"/>
-    <p:sldId id="265" r:id="rId11"/>
-    <p:sldId id="266" r:id="rId12"/>
-    <p:sldId id="267" r:id="rId13"/>
-    <p:sldId id="268" r:id="rId14"/>
-    <p:sldId id="269" r:id="rId15"/>
-    <p:sldId id="270" r:id="rId16"/>
-    <p:sldId id="271" r:id="rId17"/>
-    <p:sldId id="272" r:id="rId18"/>
+    <p:sldId id="258" r:id="rId4"/>
+    <p:sldId id="259" r:id="rId5"/>
+    <p:sldId id="260" r:id="rId6"/>
+    <p:sldId id="265" r:id="rId7"/>
+    <p:sldId id="267" r:id="rId8"/>
+    <p:sldId id="269" r:id="rId9"/>
+    <p:sldId id="271" r:id="rId10"/>
   </p:sldIdLst>
   <p:sldSz cx="12192000" cy="6858000"/>
   <p:notesSz cx="6858000" cy="9144000"/>
@@ -121,6 +113,23 @@
     </a:lvl9pPr>
   </p:defaultTextStyle>
   <p:extLst>
+    <p:ext uri="{521415D9-36F7-43E2-AB2F-B90AF26B5E84}">
+      <p14:sectionLst xmlns:p14="http://schemas.microsoft.com/office/powerpoint/2010/main">
+        <p14:section name="默认节" id="{CD783641-D15B-C649-9257-15CB589CDE99}">
+          <p14:sldIdLst>
+            <p14:sldId id="256"/>
+            <p14:sldId id="257"/>
+            <p14:sldId id="258"/>
+            <p14:sldId id="259"/>
+            <p14:sldId id="260"/>
+            <p14:sldId id="265"/>
+            <p14:sldId id="267"/>
+            <p14:sldId id="269"/>
+            <p14:sldId id="271"/>
+          </p14:sldIdLst>
+        </p14:section>
+      </p14:sectionLst>
+    </p:ext>
     <p:ext uri="{EFAFB233-063F-42B5-8137-9DF3F51BA10A}">
       <p15:sldGuideLst xmlns:p15="http://schemas.microsoft.com/office/powerpoint/2012/main"/>
     </p:ext>
@@ -275,7 +284,7 @@
           <a:p>
             <a:fld id="{1BEECCD3-2C18-45EA-89CB-0ED5AA412099}" type="datetimeFigureOut">
               <a:rPr lang="zh-CN" altLang="en-US" smtClean="0"/>
-              <a:t>2025/12/29</a:t>
+              <a:t>2026/5/5</a:t>
             </a:fld>
             <a:endParaRPr lang="zh-CN" altLang="en-US"/>
           </a:p>
@@ -473,7 +482,7 @@
           <a:p>
             <a:fld id="{1BEECCD3-2C18-45EA-89CB-0ED5AA412099}" type="datetimeFigureOut">
               <a:rPr lang="zh-CN" altLang="en-US" smtClean="0"/>
-              <a:t>2025/12/29</a:t>
+              <a:t>2026/5/5</a:t>
             </a:fld>
             <a:endParaRPr lang="zh-CN" altLang="en-US"/>
           </a:p>
@@ -681,7 +690,7 @@
           <a:p>
             <a:fld id="{1BEECCD3-2C18-45EA-89CB-0ED5AA412099}" type="datetimeFigureOut">
               <a:rPr lang="zh-CN" altLang="en-US" smtClean="0"/>
-              <a:t>2025/12/29</a:t>
+              <a:t>2026/5/5</a:t>
             </a:fld>
             <a:endParaRPr lang="zh-CN" altLang="en-US"/>
           </a:p>
@@ -879,7 +888,7 @@
           <a:p>
             <a:fld id="{1BEECCD3-2C18-45EA-89CB-0ED5AA412099}" type="datetimeFigureOut">
               <a:rPr lang="zh-CN" altLang="en-US" smtClean="0"/>
-              <a:t>2025/12/29</a:t>
+              <a:t>2026/5/5</a:t>
             </a:fld>
             <a:endParaRPr lang="zh-CN" altLang="en-US"/>
           </a:p>
@@ -1154,7 +1163,7 @@
           <a:p>
             <a:fld id="{1BEECCD3-2C18-45EA-89CB-0ED5AA412099}" type="datetimeFigureOut">
               <a:rPr lang="zh-CN" altLang="en-US" smtClean="0"/>
-              <a:t>2025/12/29</a:t>
+              <a:t>2026/5/5</a:t>
             </a:fld>
             <a:endParaRPr lang="zh-CN" altLang="en-US"/>
           </a:p>
@@ -1419,7 +1428,7 @@
           <a:p>
             <a:fld id="{1BEECCD3-2C18-45EA-89CB-0ED5AA412099}" type="datetimeFigureOut">
               <a:rPr lang="zh-CN" altLang="en-US" smtClean="0"/>
-              <a:t>2025/12/29</a:t>
+              <a:t>2026/5/5</a:t>
             </a:fld>
             <a:endParaRPr lang="zh-CN" altLang="en-US"/>
           </a:p>
@@ -1831,7 +1840,7 @@
           <a:p>
             <a:fld id="{1BEECCD3-2C18-45EA-89CB-0ED5AA412099}" type="datetimeFigureOut">
               <a:rPr lang="zh-CN" altLang="en-US" smtClean="0"/>
-              <a:t>2025/12/29</a:t>
+              <a:t>2026/5/5</a:t>
             </a:fld>
             <a:endParaRPr lang="zh-CN" altLang="en-US"/>
           </a:p>
@@ -1972,7 +1981,7 @@
           <a:p>
             <a:fld id="{1BEECCD3-2C18-45EA-89CB-0ED5AA412099}" type="datetimeFigureOut">
               <a:rPr lang="zh-CN" altLang="en-US" smtClean="0"/>
-              <a:t>2025/12/29</a:t>
+              <a:t>2026/5/5</a:t>
             </a:fld>
             <a:endParaRPr lang="zh-CN" altLang="en-US"/>
           </a:p>
@@ -2085,7 +2094,7 @@
           <a:p>
             <a:fld id="{1BEECCD3-2C18-45EA-89CB-0ED5AA412099}" type="datetimeFigureOut">
               <a:rPr lang="zh-CN" altLang="en-US" smtClean="0"/>
-              <a:t>2025/12/29</a:t>
+              <a:t>2026/5/5</a:t>
             </a:fld>
             <a:endParaRPr lang="zh-CN" altLang="en-US"/>
           </a:p>
@@ -2396,7 +2405,7 @@
           <a:p>
             <a:fld id="{1BEECCD3-2C18-45EA-89CB-0ED5AA412099}" type="datetimeFigureOut">
               <a:rPr lang="zh-CN" altLang="en-US" smtClean="0"/>
-              <a:t>2025/12/29</a:t>
+              <a:t>2026/5/5</a:t>
             </a:fld>
             <a:endParaRPr lang="zh-CN" altLang="en-US"/>
           </a:p>
@@ -2684,7 +2693,7 @@
           <a:p>
             <a:fld id="{1BEECCD3-2C18-45EA-89CB-0ED5AA412099}" type="datetimeFigureOut">
               <a:rPr lang="zh-CN" altLang="en-US" smtClean="0"/>
-              <a:t>2025/12/29</a:t>
+              <a:t>2026/5/5</a:t>
             </a:fld>
             <a:endParaRPr lang="zh-CN" altLang="en-US"/>
           </a:p>
@@ -2925,7 +2934,7 @@
           <a:p>
             <a:fld id="{1BEECCD3-2C18-45EA-89CB-0ED5AA412099}" type="datetimeFigureOut">
               <a:rPr lang="zh-CN" altLang="en-US" smtClean="0"/>
-              <a:t>2025/12/29</a:t>
+              <a:t>2026/5/5</a:t>
             </a:fld>
             <a:endParaRPr lang="zh-CN" altLang="en-US"/>
           </a:p>
@@ -3441,2233 +3450,6 @@
 </p:sld>
 </file>
 
-<file path=ppt/slides/slide10.xml><?xml version="1.0" encoding="utf-8"?>
-<p:sld xmlns:a="http://schemas.openxmlformats.org/drawingml/2006/main" xmlns:r="http://schemas.openxmlformats.org/officeDocument/2006/relationships" xmlns:p="http://schemas.openxmlformats.org/presentationml/2006/main">
-  <p:cSld>
-    <p:spTree>
-      <p:nvGrpSpPr>
-        <p:cNvPr id="1" name=""/>
-        <p:cNvGrpSpPr/>
-        <p:nvPr/>
-      </p:nvGrpSpPr>
-      <p:grpSpPr>
-        <a:xfrm>
-          <a:off x="0" y="0"/>
-          <a:ext cx="0" cy="0"/>
-          <a:chOff x="0" y="0"/>
-          <a:chExt cx="0" cy="0"/>
-        </a:xfrm>
-      </p:grpSpPr>
-      <p:sp>
-        <p:nvSpPr>
-          <p:cNvPr id="2" name="标题 1">
-            <a:extLst>
-              <a:ext uri="{FF2B5EF4-FFF2-40B4-BE49-F238E27FC236}">
-                <a16:creationId xmlns:a16="http://schemas.microsoft.com/office/drawing/2014/main" id="{8FBF488D-F1F5-93D7-F83F-757B79A33123}"/>
-              </a:ext>
-            </a:extLst>
-          </p:cNvPr>
-          <p:cNvSpPr>
-            <a:spLocks noGrp="1"/>
-          </p:cNvSpPr>
-          <p:nvPr>
-            <p:ph type="title"/>
-          </p:nvPr>
-        </p:nvSpPr>
-        <p:spPr/>
-        <p:txBody>
-          <a:bodyPr/>
-          <a:lstStyle/>
-          <a:p>
-            <a:r>
-              <a:rPr lang="en-US" altLang="zh-CN" dirty="0"/>
-              <a:t>2022</a:t>
-            </a:r>
-            <a:r>
-              <a:rPr lang="zh-CN" altLang="en-US" dirty="0"/>
-              <a:t>年度歌单 </a:t>
-            </a:r>
-            <a:r>
-              <a:rPr lang="en-US" altLang="zh-CN" dirty="0"/>
-              <a:t>8/10</a:t>
-            </a:r>
-            <a:endParaRPr lang="zh-CN" altLang="en-US" dirty="0"/>
-          </a:p>
-        </p:txBody>
-      </p:sp>
-      <p:sp>
-        <p:nvSpPr>
-          <p:cNvPr id="3" name="内容占位符 2">
-            <a:extLst>
-              <a:ext uri="{FF2B5EF4-FFF2-40B4-BE49-F238E27FC236}">
-                <a16:creationId xmlns:a16="http://schemas.microsoft.com/office/drawing/2014/main" id="{FFFA41F0-5E19-75FB-842B-B7355838F064}"/>
-              </a:ext>
-            </a:extLst>
-          </p:cNvPr>
-          <p:cNvSpPr>
-            <a:spLocks noGrp="1"/>
-          </p:cNvSpPr>
-          <p:nvPr>
-            <p:ph idx="1"/>
-          </p:nvPr>
-        </p:nvSpPr>
-        <p:spPr/>
-        <p:txBody>
-          <a:bodyPr/>
-          <a:lstStyle/>
-          <a:p>
-            <a:pPr marL="0" indent="0">
-              <a:buNone/>
-            </a:pPr>
-            <a:r>
-              <a:rPr lang="en-US" altLang="zh-CN" dirty="0">
-                <a:highlight>
-                  <a:srgbClr val="00FFFF"/>
-                </a:highlight>
-              </a:rPr>
-              <a:t>02-Op. 40,  No. 6</a:t>
-            </a:r>
-          </a:p>
-          <a:p>
-            <a:pPr marL="0" indent="0">
-              <a:buNone/>
-            </a:pPr>
-            <a:r>
-              <a:rPr lang="en-US" altLang="zh-CN" dirty="0"/>
-              <a:t>03-Reality</a:t>
-            </a:r>
-          </a:p>
-          <a:p>
-            <a:pPr marL="0" indent="0">
-              <a:buNone/>
-            </a:pPr>
-            <a:r>
-              <a:rPr lang="en-US" altLang="zh-CN" dirty="0">
-                <a:highlight>
-                  <a:srgbClr val="FFFF00"/>
-                </a:highlight>
-              </a:rPr>
-              <a:t>04-Your Move</a:t>
-            </a:r>
-          </a:p>
-          <a:p>
-            <a:pPr marL="0" indent="0">
-              <a:buNone/>
-            </a:pPr>
-            <a:r>
-              <a:rPr lang="en-US" altLang="zh-CN" dirty="0">
-                <a:highlight>
-                  <a:srgbClr val="00FFFF"/>
-                </a:highlight>
-              </a:rPr>
-              <a:t>05-Op. 40,  No. 1</a:t>
-            </a:r>
-          </a:p>
-          <a:p>
-            <a:pPr marL="0" indent="0">
-              <a:buNone/>
-            </a:pPr>
-            <a:r>
-              <a:rPr lang="en-US" altLang="zh-CN" dirty="0">
-                <a:highlight>
-                  <a:srgbClr val="00FFFF"/>
-                </a:highlight>
-              </a:rPr>
-              <a:t>06-Op. 40,  No. 3</a:t>
-            </a:r>
-          </a:p>
-          <a:p>
-            <a:pPr marL="0" indent="0">
-              <a:buNone/>
-            </a:pPr>
-            <a:r>
-              <a:rPr lang="en-US" altLang="zh-CN" dirty="0"/>
-              <a:t>07-</a:t>
-            </a:r>
-            <a:r>
-              <a:rPr lang="zh-CN" altLang="en-US" dirty="0"/>
-              <a:t>爱の诗</a:t>
-            </a:r>
-            <a:endParaRPr lang="en-US" altLang="zh-CN" dirty="0"/>
-          </a:p>
-          <a:p>
-            <a:pPr marL="0" indent="0">
-              <a:buNone/>
-            </a:pPr>
-            <a:r>
-              <a:rPr lang="en-US" altLang="zh-CN" dirty="0"/>
-              <a:t>08-A Short Story</a:t>
-            </a:r>
-          </a:p>
-          <a:p>
-            <a:pPr marL="0" indent="0">
-              <a:buNone/>
-            </a:pPr>
-            <a:r>
-              <a:rPr lang="en-US" altLang="zh-CN" dirty="0"/>
-              <a:t>10-</a:t>
-            </a:r>
-            <a:r>
-              <a:rPr lang="zh-CN" altLang="en-US" dirty="0"/>
-              <a:t>罗生门</a:t>
-            </a:r>
-          </a:p>
-          <a:p>
-            <a:pPr marL="0" indent="0">
-              <a:buNone/>
-            </a:pPr>
-            <a:endParaRPr lang="zh-CN" altLang="en-US" dirty="0"/>
-          </a:p>
-          <a:p>
-            <a:pPr marL="0" indent="0">
-              <a:buNone/>
-            </a:pPr>
-            <a:endParaRPr lang="zh-CN" altLang="en-US" dirty="0"/>
-          </a:p>
-        </p:txBody>
-      </p:sp>
-      <p:pic>
-        <p:nvPicPr>
-          <p:cNvPr id="4" name="图片 3">
-            <a:extLst>
-              <a:ext uri="{FF2B5EF4-FFF2-40B4-BE49-F238E27FC236}">
-                <a16:creationId xmlns:a16="http://schemas.microsoft.com/office/drawing/2014/main" id="{8D63DF60-5C82-0983-1A85-708F920530EE}"/>
-              </a:ext>
-            </a:extLst>
-          </p:cNvPr>
-          <p:cNvPicPr>
-            <a:picLocks noChangeAspect="1"/>
-          </p:cNvPicPr>
-          <p:nvPr/>
-        </p:nvPicPr>
-        <p:blipFill>
-          <a:blip r:embed="rId2"/>
-          <a:stretch>
-            <a:fillRect/>
-          </a:stretch>
-        </p:blipFill>
-        <p:spPr>
-          <a:xfrm>
-            <a:off x="7378212" y="0"/>
-            <a:ext cx="4813788" cy="6858000"/>
-          </a:xfrm>
-          <a:prstGeom prst="rect">
-            <a:avLst/>
-          </a:prstGeom>
-        </p:spPr>
-      </p:pic>
-      <p:pic>
-        <p:nvPicPr>
-          <p:cNvPr id="5" name="图片 4">
-            <a:extLst>
-              <a:ext uri="{FF2B5EF4-FFF2-40B4-BE49-F238E27FC236}">
-                <a16:creationId xmlns:a16="http://schemas.microsoft.com/office/drawing/2014/main" id="{95F22B46-4596-B3F9-6071-07DB705D6F7E}"/>
-              </a:ext>
-            </a:extLst>
-          </p:cNvPr>
-          <p:cNvPicPr>
-            <a:picLocks noChangeAspect="1"/>
-          </p:cNvPicPr>
-          <p:nvPr/>
-        </p:nvPicPr>
-        <p:blipFill rotWithShape="1">
-          <a:blip r:embed="rId3"/>
-          <a:srcRect l="27617" t="-870" r="37927" b="34348"/>
-          <a:stretch/>
-        </p:blipFill>
-        <p:spPr>
-          <a:xfrm>
-            <a:off x="3568180" y="2432380"/>
-            <a:ext cx="1080053" cy="1251878"/>
-          </a:xfrm>
-          <a:prstGeom prst="rect">
-            <a:avLst/>
-          </a:prstGeom>
-        </p:spPr>
-      </p:pic>
-    </p:spTree>
-    <p:extLst>
-      <p:ext uri="{BB962C8B-B14F-4D97-AF65-F5344CB8AC3E}">
-        <p14:creationId xmlns:p14="http://schemas.microsoft.com/office/powerpoint/2010/main" val="1709954340"/>
-      </p:ext>
-    </p:extLst>
-  </p:cSld>
-  <p:clrMapOvr>
-    <a:masterClrMapping/>
-  </p:clrMapOvr>
-</p:sld>
-</file>
-
-<file path=ppt/slides/slide11.xml><?xml version="1.0" encoding="utf-8"?>
-<p:sld xmlns:a="http://schemas.openxmlformats.org/drawingml/2006/main" xmlns:r="http://schemas.openxmlformats.org/officeDocument/2006/relationships" xmlns:p="http://schemas.openxmlformats.org/presentationml/2006/main">
-  <p:cSld>
-    <p:spTree>
-      <p:nvGrpSpPr>
-        <p:cNvPr id="1" name=""/>
-        <p:cNvGrpSpPr/>
-        <p:nvPr/>
-      </p:nvGrpSpPr>
-      <p:grpSpPr>
-        <a:xfrm>
-          <a:off x="0" y="0"/>
-          <a:ext cx="0" cy="0"/>
-          <a:chOff x="0" y="0"/>
-          <a:chExt cx="0" cy="0"/>
-        </a:xfrm>
-      </p:grpSpPr>
-      <p:sp>
-        <p:nvSpPr>
-          <p:cNvPr id="2" name="标题 1">
-            <a:extLst>
-              <a:ext uri="{FF2B5EF4-FFF2-40B4-BE49-F238E27FC236}">
-                <a16:creationId xmlns:a16="http://schemas.microsoft.com/office/drawing/2014/main" id="{8FBF488D-F1F5-93D7-F83F-757B79A33123}"/>
-              </a:ext>
-            </a:extLst>
-          </p:cNvPr>
-          <p:cNvSpPr>
-            <a:spLocks noGrp="1"/>
-          </p:cNvSpPr>
-          <p:nvPr>
-            <p:ph type="title"/>
-          </p:nvPr>
-        </p:nvSpPr>
-        <p:spPr/>
-        <p:txBody>
-          <a:bodyPr/>
-          <a:lstStyle/>
-          <a:p>
-            <a:r>
-              <a:rPr lang="en-US" altLang="zh-CN" dirty="0"/>
-              <a:t>2022</a:t>
-            </a:r>
-            <a:r>
-              <a:rPr lang="zh-CN" altLang="en-US" dirty="0"/>
-              <a:t>年度歌单 </a:t>
-            </a:r>
-            <a:r>
-              <a:rPr lang="en-US" altLang="zh-CN" dirty="0"/>
-              <a:t>8/10</a:t>
-            </a:r>
-            <a:endParaRPr lang="zh-CN" altLang="en-US" dirty="0"/>
-          </a:p>
-        </p:txBody>
-      </p:sp>
-      <p:sp>
-        <p:nvSpPr>
-          <p:cNvPr id="3" name="内容占位符 2">
-            <a:extLst>
-              <a:ext uri="{FF2B5EF4-FFF2-40B4-BE49-F238E27FC236}">
-                <a16:creationId xmlns:a16="http://schemas.microsoft.com/office/drawing/2014/main" id="{FFFA41F0-5E19-75FB-842B-B7355838F064}"/>
-              </a:ext>
-            </a:extLst>
-          </p:cNvPr>
-          <p:cNvSpPr>
-            <a:spLocks noGrp="1"/>
-          </p:cNvSpPr>
-          <p:nvPr>
-            <p:ph idx="1"/>
-          </p:nvPr>
-        </p:nvSpPr>
-        <p:spPr>
-          <a:xfrm>
-            <a:off x="838200" y="1825625"/>
-            <a:ext cx="6377609" cy="4351338"/>
-          </a:xfrm>
-        </p:spPr>
-        <p:txBody>
-          <a:bodyPr/>
-          <a:lstStyle/>
-          <a:p>
-            <a:pPr marL="0" indent="0">
-              <a:buNone/>
-            </a:pPr>
-            <a:r>
-              <a:rPr lang="zh-CN" altLang="en-US" dirty="0"/>
-              <a:t>深入挖掘</a:t>
-            </a:r>
-            <a:r>
-              <a:rPr lang="en-US" altLang="zh-CN" dirty="0"/>
-              <a:t>Kapustin Op. 40, </a:t>
-            </a:r>
-            <a:r>
-              <a:rPr lang="zh-CN" altLang="en-US" dirty="0"/>
-              <a:t>大为震撼</a:t>
-            </a:r>
-            <a:r>
-              <a:rPr lang="en-US" altLang="zh-CN" dirty="0"/>
-              <a:t>, </a:t>
-            </a:r>
-            <a:r>
-              <a:rPr lang="zh-CN" altLang="en-US" dirty="0"/>
-              <a:t>确立练琴的最终目标</a:t>
-            </a:r>
-            <a:r>
-              <a:rPr lang="en-US" altLang="zh-CN" dirty="0"/>
-              <a:t>(?). Your Move</a:t>
-            </a:r>
-            <a:r>
-              <a:rPr lang="zh-CN" altLang="en-US" dirty="0"/>
-              <a:t>是难得的</a:t>
-            </a:r>
-            <a:r>
-              <a:rPr lang="en-US" altLang="zh-CN" dirty="0"/>
-              <a:t>Bounce</a:t>
-            </a:r>
-            <a:r>
-              <a:rPr lang="zh-CN" altLang="en-US" dirty="0"/>
-              <a:t>精品</a:t>
-            </a:r>
-            <a:r>
-              <a:rPr lang="en-US" altLang="zh-CN" dirty="0"/>
-              <a:t>; </a:t>
-            </a:r>
-            <a:r>
-              <a:rPr lang="zh-CN" altLang="en-US" dirty="0"/>
-              <a:t>中文歌曲开荒</a:t>
-            </a:r>
-            <a:r>
-              <a:rPr lang="en-US" altLang="zh-CN" dirty="0"/>
-              <a:t>, </a:t>
-            </a:r>
-            <a:r>
-              <a:rPr lang="zh-CN" altLang="en-US" dirty="0"/>
-              <a:t>听麦浚龙</a:t>
-            </a:r>
-            <a:r>
-              <a:rPr lang="en-US" altLang="zh-CN" dirty="0"/>
-              <a:t>. </a:t>
-            </a:r>
-            <a:r>
-              <a:rPr lang="zh-CN" altLang="en-US" dirty="0"/>
-              <a:t>做了班歌</a:t>
-            </a:r>
-            <a:r>
-              <a:rPr lang="en-US" altLang="zh-CN" dirty="0"/>
-              <a:t>, </a:t>
-            </a:r>
-            <a:r>
-              <a:rPr lang="zh-CN" altLang="en-US" dirty="0"/>
-              <a:t>熟悉</a:t>
-            </a:r>
-            <a:r>
-              <a:rPr lang="en-US" altLang="zh-CN" dirty="0" err="1"/>
-              <a:t>Kontakt</a:t>
-            </a:r>
-            <a:r>
-              <a:rPr lang="en-US" altLang="zh-CN" dirty="0"/>
-              <a:t> 7</a:t>
-            </a:r>
-            <a:endParaRPr lang="zh-CN" altLang="en-US" dirty="0"/>
-          </a:p>
-          <a:p>
-            <a:pPr marL="0" indent="0">
-              <a:buNone/>
-            </a:pPr>
-            <a:endParaRPr lang="zh-CN" altLang="en-US" dirty="0"/>
-          </a:p>
-        </p:txBody>
-      </p:sp>
-      <p:pic>
-        <p:nvPicPr>
-          <p:cNvPr id="4" name="图片 3">
-            <a:extLst>
-              <a:ext uri="{FF2B5EF4-FFF2-40B4-BE49-F238E27FC236}">
-                <a16:creationId xmlns:a16="http://schemas.microsoft.com/office/drawing/2014/main" id="{8D63DF60-5C82-0983-1A85-708F920530EE}"/>
-              </a:ext>
-            </a:extLst>
-          </p:cNvPr>
-          <p:cNvPicPr>
-            <a:picLocks noChangeAspect="1"/>
-          </p:cNvPicPr>
-          <p:nvPr/>
-        </p:nvPicPr>
-        <p:blipFill>
-          <a:blip r:embed="rId2"/>
-          <a:stretch>
-            <a:fillRect/>
-          </a:stretch>
-        </p:blipFill>
-        <p:spPr>
-          <a:xfrm>
-            <a:off x="7378212" y="0"/>
-            <a:ext cx="4813788" cy="6858000"/>
-          </a:xfrm>
-          <a:prstGeom prst="rect">
-            <a:avLst/>
-          </a:prstGeom>
-        </p:spPr>
-      </p:pic>
-    </p:spTree>
-    <p:extLst>
-      <p:ext uri="{BB962C8B-B14F-4D97-AF65-F5344CB8AC3E}">
-        <p14:creationId xmlns:p14="http://schemas.microsoft.com/office/powerpoint/2010/main" val="2726158454"/>
-      </p:ext>
-    </p:extLst>
-  </p:cSld>
-  <p:clrMapOvr>
-    <a:masterClrMapping/>
-  </p:clrMapOvr>
-</p:sld>
-</file>
-
-<file path=ppt/slides/slide12.xml><?xml version="1.0" encoding="utf-8"?>
-<p:sld xmlns:a="http://schemas.openxmlformats.org/drawingml/2006/main" xmlns:r="http://schemas.openxmlformats.org/officeDocument/2006/relationships" xmlns:p="http://schemas.openxmlformats.org/presentationml/2006/main">
-  <p:cSld>
-    <p:spTree>
-      <p:nvGrpSpPr>
-        <p:cNvPr id="1" name=""/>
-        <p:cNvGrpSpPr/>
-        <p:nvPr/>
-      </p:nvGrpSpPr>
-      <p:grpSpPr>
-        <a:xfrm>
-          <a:off x="0" y="0"/>
-          <a:ext cx="0" cy="0"/>
-          <a:chOff x="0" y="0"/>
-          <a:chExt cx="0" cy="0"/>
-        </a:xfrm>
-      </p:grpSpPr>
-      <p:sp>
-        <p:nvSpPr>
-          <p:cNvPr id="2" name="标题 1">
-            <a:extLst>
-              <a:ext uri="{FF2B5EF4-FFF2-40B4-BE49-F238E27FC236}">
-                <a16:creationId xmlns:a16="http://schemas.microsoft.com/office/drawing/2014/main" id="{418B3808-1535-0342-3C36-C611DB3CB551}"/>
-              </a:ext>
-            </a:extLst>
-          </p:cNvPr>
-          <p:cNvSpPr>
-            <a:spLocks noGrp="1"/>
-          </p:cNvSpPr>
-          <p:nvPr>
-            <p:ph type="title"/>
-          </p:nvPr>
-        </p:nvSpPr>
-        <p:spPr/>
-        <p:txBody>
-          <a:bodyPr/>
-          <a:lstStyle/>
-          <a:p>
-            <a:r>
-              <a:rPr lang="en-US" altLang="zh-CN" dirty="0"/>
-              <a:t>2023</a:t>
-            </a:r>
-            <a:r>
-              <a:rPr lang="zh-CN" altLang="en-US" dirty="0"/>
-              <a:t>年度歌单 </a:t>
-            </a:r>
-            <a:r>
-              <a:rPr lang="en-US" altLang="zh-CN" dirty="0"/>
-              <a:t>9/10</a:t>
-            </a:r>
-            <a:endParaRPr lang="zh-CN" altLang="en-US" dirty="0"/>
-          </a:p>
-        </p:txBody>
-      </p:sp>
-      <p:sp>
-        <p:nvSpPr>
-          <p:cNvPr id="3" name="内容占位符 2">
-            <a:extLst>
-              <a:ext uri="{FF2B5EF4-FFF2-40B4-BE49-F238E27FC236}">
-                <a16:creationId xmlns:a16="http://schemas.microsoft.com/office/drawing/2014/main" id="{31AF7579-1B1B-62A1-7807-E186B7408831}"/>
-              </a:ext>
-            </a:extLst>
-          </p:cNvPr>
-          <p:cNvSpPr>
-            <a:spLocks noGrp="1"/>
-          </p:cNvSpPr>
-          <p:nvPr>
-            <p:ph idx="1"/>
-          </p:nvPr>
-        </p:nvSpPr>
-        <p:spPr/>
-        <p:txBody>
-          <a:bodyPr>
-            <a:normAutofit lnSpcReduction="10000"/>
-          </a:bodyPr>
-          <a:lstStyle/>
-          <a:p>
-            <a:pPr marL="0" indent="0">
-              <a:buNone/>
-            </a:pPr>
-            <a:r>
-              <a:rPr lang="en-US" altLang="zh-CN" dirty="0">
-                <a:highlight>
-                  <a:srgbClr val="00FFFF"/>
-                </a:highlight>
-              </a:rPr>
-              <a:t>01-Op. 40,  No. 8</a:t>
-            </a:r>
-          </a:p>
-          <a:p>
-            <a:pPr marL="0" indent="0">
-              <a:buNone/>
-            </a:pPr>
-            <a:r>
-              <a:rPr lang="en-US" altLang="zh-CN" dirty="0">
-                <a:highlight>
-                  <a:srgbClr val="00FFFF"/>
-                </a:highlight>
-              </a:rPr>
-              <a:t>02-Op. 40,  No. 2</a:t>
-            </a:r>
-          </a:p>
-          <a:p>
-            <a:pPr marL="0" indent="0">
-              <a:buNone/>
-            </a:pPr>
-            <a:r>
-              <a:rPr lang="en-US" altLang="zh-CN" dirty="0">
-                <a:highlight>
-                  <a:srgbClr val="00FFFF"/>
-                </a:highlight>
-              </a:rPr>
-              <a:t>03-Op. 40,  No. 8</a:t>
-            </a:r>
-          </a:p>
-          <a:p>
-            <a:pPr marL="0" indent="0">
-              <a:buNone/>
-            </a:pPr>
-            <a:r>
-              <a:rPr lang="en-US" altLang="zh-CN" dirty="0"/>
-              <a:t>04-summit</a:t>
-            </a:r>
-          </a:p>
-          <a:p>
-            <a:pPr marL="0" indent="0">
-              <a:buNone/>
-            </a:pPr>
-            <a:r>
-              <a:rPr lang="en-US" altLang="zh-CN" dirty="0"/>
-              <a:t>06-Loretta</a:t>
-            </a:r>
-          </a:p>
-          <a:p>
-            <a:pPr marL="0" indent="0">
-              <a:buNone/>
-            </a:pPr>
-            <a:r>
-              <a:rPr lang="en-US" altLang="zh-CN" dirty="0"/>
-              <a:t>07-Wonderful Slippery Thing</a:t>
-            </a:r>
-          </a:p>
-          <a:p>
-            <a:pPr marL="0" indent="0">
-              <a:buNone/>
-            </a:pPr>
-            <a:r>
-              <a:rPr lang="en-US" altLang="zh-CN" dirty="0">
-                <a:highlight>
-                  <a:srgbClr val="00FFFF"/>
-                </a:highlight>
-              </a:rPr>
-              <a:t>08-Op. 40,  No. 3</a:t>
-            </a:r>
-          </a:p>
-          <a:p>
-            <a:pPr marL="0" indent="0">
-              <a:buNone/>
-            </a:pPr>
-            <a:r>
-              <a:rPr lang="en-US" altLang="zh-CN" dirty="0">
-                <a:highlight>
-                  <a:srgbClr val="FFFF00"/>
-                </a:highlight>
-              </a:rPr>
-              <a:t>09-Velours</a:t>
-            </a:r>
-          </a:p>
-          <a:p>
-            <a:pPr marL="0" indent="0">
-              <a:buNone/>
-            </a:pPr>
-            <a:r>
-              <a:rPr lang="en-US" altLang="zh-CN" dirty="0"/>
-              <a:t>10-Playing God</a:t>
-            </a:r>
-            <a:endParaRPr lang="zh-CN" altLang="en-US" dirty="0"/>
-          </a:p>
-          <a:p>
-            <a:pPr marL="0" indent="0">
-              <a:buNone/>
-            </a:pPr>
-            <a:endParaRPr lang="zh-CN" altLang="en-US" dirty="0"/>
-          </a:p>
-          <a:p>
-            <a:pPr marL="0" indent="0">
-              <a:buNone/>
-            </a:pPr>
-            <a:endParaRPr lang="zh-CN" altLang="en-US" dirty="0"/>
-          </a:p>
-          <a:p>
-            <a:pPr marL="0" indent="0">
-              <a:buNone/>
-            </a:pPr>
-            <a:endParaRPr lang="zh-CN" altLang="en-US" dirty="0"/>
-          </a:p>
-        </p:txBody>
-      </p:sp>
-      <p:pic>
-        <p:nvPicPr>
-          <p:cNvPr id="4" name="图片 3">
-            <a:extLst>
-              <a:ext uri="{FF2B5EF4-FFF2-40B4-BE49-F238E27FC236}">
-                <a16:creationId xmlns:a16="http://schemas.microsoft.com/office/drawing/2014/main" id="{77320971-CF53-0586-9FE2-7619183C687B}"/>
-              </a:ext>
-            </a:extLst>
-          </p:cNvPr>
-          <p:cNvPicPr>
-            <a:picLocks noChangeAspect="1"/>
-          </p:cNvPicPr>
-          <p:nvPr/>
-        </p:nvPicPr>
-        <p:blipFill>
-          <a:blip r:embed="rId2"/>
-          <a:stretch>
-            <a:fillRect/>
-          </a:stretch>
-        </p:blipFill>
-        <p:spPr>
-          <a:xfrm>
-            <a:off x="7935310" y="0"/>
-            <a:ext cx="4256690" cy="6858000"/>
-          </a:xfrm>
-          <a:prstGeom prst="rect">
-            <a:avLst/>
-          </a:prstGeom>
-        </p:spPr>
-      </p:pic>
-      <p:pic>
-        <p:nvPicPr>
-          <p:cNvPr id="5" name="图片 4">
-            <a:extLst>
-              <a:ext uri="{FF2B5EF4-FFF2-40B4-BE49-F238E27FC236}">
-                <a16:creationId xmlns:a16="http://schemas.microsoft.com/office/drawing/2014/main" id="{389E5322-80BD-8B75-3644-A19F5D50347F}"/>
-              </a:ext>
-            </a:extLst>
-          </p:cNvPr>
-          <p:cNvPicPr>
-            <a:picLocks noChangeAspect="1"/>
-          </p:cNvPicPr>
-          <p:nvPr/>
-        </p:nvPicPr>
-        <p:blipFill rotWithShape="1">
-          <a:blip r:embed="rId3"/>
-          <a:srcRect l="27617" t="-870" r="37927" b="34348"/>
-          <a:stretch/>
-        </p:blipFill>
-        <p:spPr>
-          <a:xfrm>
-            <a:off x="3617843" y="4639665"/>
-            <a:ext cx="1080053" cy="1251878"/>
-          </a:xfrm>
-          <a:prstGeom prst="rect">
-            <a:avLst/>
-          </a:prstGeom>
-        </p:spPr>
-      </p:pic>
-    </p:spTree>
-    <p:extLst>
-      <p:ext uri="{BB962C8B-B14F-4D97-AF65-F5344CB8AC3E}">
-        <p14:creationId xmlns:p14="http://schemas.microsoft.com/office/powerpoint/2010/main" val="2161395820"/>
-      </p:ext>
-    </p:extLst>
-  </p:cSld>
-  <p:clrMapOvr>
-    <a:masterClrMapping/>
-  </p:clrMapOvr>
-</p:sld>
-</file>
-
-<file path=ppt/slides/slide13.xml><?xml version="1.0" encoding="utf-8"?>
-<p:sld xmlns:a="http://schemas.openxmlformats.org/drawingml/2006/main" xmlns:r="http://schemas.openxmlformats.org/officeDocument/2006/relationships" xmlns:p="http://schemas.openxmlformats.org/presentationml/2006/main">
-  <p:cSld>
-    <p:spTree>
-      <p:nvGrpSpPr>
-        <p:cNvPr id="1" name=""/>
-        <p:cNvGrpSpPr/>
-        <p:nvPr/>
-      </p:nvGrpSpPr>
-      <p:grpSpPr>
-        <a:xfrm>
-          <a:off x="0" y="0"/>
-          <a:ext cx="0" cy="0"/>
-          <a:chOff x="0" y="0"/>
-          <a:chExt cx="0" cy="0"/>
-        </a:xfrm>
-      </p:grpSpPr>
-      <p:sp>
-        <p:nvSpPr>
-          <p:cNvPr id="2" name="标题 1">
-            <a:extLst>
-              <a:ext uri="{FF2B5EF4-FFF2-40B4-BE49-F238E27FC236}">
-                <a16:creationId xmlns:a16="http://schemas.microsoft.com/office/drawing/2014/main" id="{418B3808-1535-0342-3C36-C611DB3CB551}"/>
-              </a:ext>
-            </a:extLst>
-          </p:cNvPr>
-          <p:cNvSpPr>
-            <a:spLocks noGrp="1"/>
-          </p:cNvSpPr>
-          <p:nvPr>
-            <p:ph type="title"/>
-          </p:nvPr>
-        </p:nvSpPr>
-        <p:spPr/>
-        <p:txBody>
-          <a:bodyPr/>
-          <a:lstStyle/>
-          <a:p>
-            <a:r>
-              <a:rPr lang="en-US" altLang="zh-CN" dirty="0"/>
-              <a:t>2023</a:t>
-            </a:r>
-            <a:r>
-              <a:rPr lang="zh-CN" altLang="en-US" dirty="0"/>
-              <a:t>年度歌单 </a:t>
-            </a:r>
-            <a:r>
-              <a:rPr lang="en-US" altLang="zh-CN" dirty="0"/>
-              <a:t>9/10</a:t>
-            </a:r>
-            <a:endParaRPr lang="zh-CN" altLang="en-US" dirty="0"/>
-          </a:p>
-        </p:txBody>
-      </p:sp>
-      <p:sp>
-        <p:nvSpPr>
-          <p:cNvPr id="3" name="内容占位符 2">
-            <a:extLst>
-              <a:ext uri="{FF2B5EF4-FFF2-40B4-BE49-F238E27FC236}">
-                <a16:creationId xmlns:a16="http://schemas.microsoft.com/office/drawing/2014/main" id="{31AF7579-1B1B-62A1-7807-E186B7408831}"/>
-              </a:ext>
-            </a:extLst>
-          </p:cNvPr>
-          <p:cNvSpPr>
-            <a:spLocks noGrp="1"/>
-          </p:cNvSpPr>
-          <p:nvPr>
-            <p:ph idx="1"/>
-          </p:nvPr>
-        </p:nvSpPr>
-        <p:spPr>
-          <a:xfrm>
-            <a:off x="838200" y="1825625"/>
-            <a:ext cx="7023652" cy="4351338"/>
-          </a:xfrm>
-        </p:spPr>
-        <p:txBody>
-          <a:bodyPr>
-            <a:normAutofit/>
-          </a:bodyPr>
-          <a:lstStyle/>
-          <a:p>
-            <a:pPr marL="0" indent="0">
-              <a:buNone/>
-            </a:pPr>
-            <a:r>
-              <a:rPr lang="zh-CN" altLang="en-US" dirty="0"/>
-              <a:t>沉迷练琴</a:t>
-            </a:r>
-            <a:r>
-              <a:rPr lang="en-US" altLang="zh-CN" dirty="0"/>
-              <a:t>; </a:t>
-            </a:r>
-            <a:r>
-              <a:rPr lang="zh-CN" altLang="en-US" dirty="0"/>
-              <a:t>感受小体量作品</a:t>
-            </a:r>
-            <a:r>
-              <a:rPr lang="en-US" altLang="zh-CN" dirty="0"/>
-              <a:t>, </a:t>
-            </a:r>
-            <a:r>
-              <a:rPr lang="zh-CN" altLang="en-US" dirty="0"/>
-              <a:t>认识电子爵士大师</a:t>
-            </a:r>
-            <a:r>
-              <a:rPr lang="en-US" altLang="zh-CN" dirty="0" err="1"/>
-              <a:t>Anomalie</a:t>
-            </a:r>
-            <a:r>
-              <a:rPr lang="en-US" altLang="zh-CN" dirty="0"/>
-              <a:t>, </a:t>
-            </a:r>
-            <a:r>
-              <a:rPr lang="zh-CN" altLang="en-US" dirty="0"/>
-              <a:t>制作目前最佳单曲</a:t>
-            </a:r>
-            <a:r>
-              <a:rPr lang="en-US" altLang="zh-CN" dirty="0"/>
-              <a:t>Walking On Air; </a:t>
-            </a:r>
-            <a:r>
-              <a:rPr lang="zh-CN" altLang="en-US" dirty="0"/>
-              <a:t>纯音乐</a:t>
-            </a:r>
-            <a:r>
-              <a:rPr lang="en-US" altLang="zh-CN" dirty="0"/>
-              <a:t>, Wonderful Slippery Thing, Playing God</a:t>
-            </a:r>
-            <a:r>
-              <a:rPr lang="zh-CN" altLang="en-US" dirty="0"/>
-              <a:t>都极好</a:t>
-            </a:r>
-            <a:r>
-              <a:rPr lang="en-US" altLang="zh-CN" dirty="0"/>
-              <a:t>; </a:t>
-            </a:r>
-            <a:r>
-              <a:rPr lang="zh-CN" altLang="en-US" dirty="0"/>
-              <a:t>流行听姜根</a:t>
-            </a:r>
-          </a:p>
-          <a:p>
-            <a:pPr marL="0" indent="0">
-              <a:buNone/>
-            </a:pPr>
-            <a:endParaRPr lang="zh-CN" altLang="en-US" dirty="0"/>
-          </a:p>
-          <a:p>
-            <a:pPr marL="0" indent="0">
-              <a:buNone/>
-            </a:pPr>
-            <a:endParaRPr lang="zh-CN" altLang="en-US" dirty="0"/>
-          </a:p>
-          <a:p>
-            <a:pPr marL="0" indent="0">
-              <a:buNone/>
-            </a:pPr>
-            <a:endParaRPr lang="zh-CN" altLang="en-US" dirty="0"/>
-          </a:p>
-        </p:txBody>
-      </p:sp>
-      <p:pic>
-        <p:nvPicPr>
-          <p:cNvPr id="4" name="图片 3">
-            <a:extLst>
-              <a:ext uri="{FF2B5EF4-FFF2-40B4-BE49-F238E27FC236}">
-                <a16:creationId xmlns:a16="http://schemas.microsoft.com/office/drawing/2014/main" id="{77320971-CF53-0586-9FE2-7619183C687B}"/>
-              </a:ext>
-            </a:extLst>
-          </p:cNvPr>
-          <p:cNvPicPr>
-            <a:picLocks noChangeAspect="1"/>
-          </p:cNvPicPr>
-          <p:nvPr/>
-        </p:nvPicPr>
-        <p:blipFill>
-          <a:blip r:embed="rId2"/>
-          <a:stretch>
-            <a:fillRect/>
-          </a:stretch>
-        </p:blipFill>
-        <p:spPr>
-          <a:xfrm>
-            <a:off x="7935310" y="0"/>
-            <a:ext cx="4256690" cy="6858000"/>
-          </a:xfrm>
-          <a:prstGeom prst="rect">
-            <a:avLst/>
-          </a:prstGeom>
-        </p:spPr>
-      </p:pic>
-    </p:spTree>
-    <p:extLst>
-      <p:ext uri="{BB962C8B-B14F-4D97-AF65-F5344CB8AC3E}">
-        <p14:creationId xmlns:p14="http://schemas.microsoft.com/office/powerpoint/2010/main" val="3406509151"/>
-      </p:ext>
-    </p:extLst>
-  </p:cSld>
-  <p:clrMapOvr>
-    <a:masterClrMapping/>
-  </p:clrMapOvr>
-</p:sld>
-</file>
-
-<file path=ppt/slides/slide14.xml><?xml version="1.0" encoding="utf-8"?>
-<p:sld xmlns:a="http://schemas.openxmlformats.org/drawingml/2006/main" xmlns:r="http://schemas.openxmlformats.org/officeDocument/2006/relationships" xmlns:p="http://schemas.openxmlformats.org/presentationml/2006/main">
-  <p:cSld>
-    <p:spTree>
-      <p:nvGrpSpPr>
-        <p:cNvPr id="1" name=""/>
-        <p:cNvGrpSpPr/>
-        <p:nvPr/>
-      </p:nvGrpSpPr>
-      <p:grpSpPr>
-        <a:xfrm>
-          <a:off x="0" y="0"/>
-          <a:ext cx="0" cy="0"/>
-          <a:chOff x="0" y="0"/>
-          <a:chExt cx="0" cy="0"/>
-        </a:xfrm>
-      </p:grpSpPr>
-      <p:sp>
-        <p:nvSpPr>
-          <p:cNvPr id="2" name="标题 1">
-            <a:extLst>
-              <a:ext uri="{FF2B5EF4-FFF2-40B4-BE49-F238E27FC236}">
-                <a16:creationId xmlns:a16="http://schemas.microsoft.com/office/drawing/2014/main" id="{91ABC539-E50B-4BED-8076-BFB2F8413F20}"/>
-              </a:ext>
-            </a:extLst>
-          </p:cNvPr>
-          <p:cNvSpPr>
-            <a:spLocks noGrp="1"/>
-          </p:cNvSpPr>
-          <p:nvPr>
-            <p:ph type="title"/>
-          </p:nvPr>
-        </p:nvSpPr>
-        <p:spPr/>
-        <p:txBody>
-          <a:bodyPr/>
-          <a:lstStyle/>
-          <a:p>
-            <a:r>
-              <a:rPr lang="en-US" altLang="zh-CN" dirty="0"/>
-              <a:t>2024</a:t>
-            </a:r>
-            <a:r>
-              <a:rPr lang="zh-CN" altLang="en-US" dirty="0"/>
-              <a:t>年度歌单 </a:t>
-            </a:r>
-            <a:r>
-              <a:rPr lang="en-US" altLang="zh-CN" dirty="0"/>
-              <a:t>10/10</a:t>
-            </a:r>
-            <a:endParaRPr lang="zh-CN" altLang="en-US" dirty="0"/>
-          </a:p>
-        </p:txBody>
-      </p:sp>
-      <p:sp>
-        <p:nvSpPr>
-          <p:cNvPr id="3" name="内容占位符 2">
-            <a:extLst>
-              <a:ext uri="{FF2B5EF4-FFF2-40B4-BE49-F238E27FC236}">
-                <a16:creationId xmlns:a16="http://schemas.microsoft.com/office/drawing/2014/main" id="{45592CE2-370D-465C-921E-9859141890F6}"/>
-              </a:ext>
-            </a:extLst>
-          </p:cNvPr>
-          <p:cNvSpPr>
-            <a:spLocks noGrp="1"/>
-          </p:cNvSpPr>
-          <p:nvPr>
-            <p:ph idx="1"/>
-          </p:nvPr>
-        </p:nvSpPr>
-        <p:spPr/>
-        <p:txBody>
-          <a:bodyPr>
-            <a:normAutofit fontScale="92500" lnSpcReduction="20000"/>
-          </a:bodyPr>
-          <a:lstStyle/>
-          <a:p>
-            <a:pPr marL="0" indent="0">
-              <a:buNone/>
-            </a:pPr>
-            <a:r>
-              <a:rPr lang="en-US" altLang="zh-CN" dirty="0">
-                <a:highlight>
-                  <a:srgbClr val="FFFF00"/>
-                </a:highlight>
-              </a:rPr>
-              <a:t>01-Wading Trough The Crowds</a:t>
-            </a:r>
-          </a:p>
-          <a:p>
-            <a:pPr marL="0" indent="0">
-              <a:buNone/>
-            </a:pPr>
-            <a:r>
-              <a:rPr lang="en-US" altLang="zh-CN" dirty="0">
-                <a:highlight>
-                  <a:srgbClr val="00FFFF"/>
-                </a:highlight>
-              </a:rPr>
-              <a:t>02-Op. 39 : 1</a:t>
-            </a:r>
-          </a:p>
-          <a:p>
-            <a:pPr marL="0" indent="0">
-              <a:buNone/>
-            </a:pPr>
-            <a:r>
-              <a:rPr lang="en-US" altLang="zh-CN" dirty="0"/>
-              <a:t>03-Duvet</a:t>
-            </a:r>
-          </a:p>
-          <a:p>
-            <a:pPr marL="0" indent="0">
-              <a:buNone/>
-            </a:pPr>
-            <a:r>
-              <a:rPr lang="en-US" altLang="zh-CN" dirty="0">
-                <a:highlight>
-                  <a:srgbClr val="00FFFF"/>
-                </a:highlight>
-              </a:rPr>
-              <a:t>04-Op. 40,  No. 1</a:t>
-            </a:r>
-          </a:p>
-          <a:p>
-            <a:pPr marL="0" indent="0">
-              <a:buNone/>
-            </a:pPr>
-            <a:r>
-              <a:rPr lang="en-US" altLang="zh-CN" dirty="0">
-                <a:highlight>
-                  <a:srgbClr val="00FFFF"/>
-                </a:highlight>
-              </a:rPr>
-              <a:t>05-Op. 40,  No. 8</a:t>
-            </a:r>
-          </a:p>
-          <a:p>
-            <a:pPr marL="0" indent="0">
-              <a:buNone/>
-            </a:pPr>
-            <a:r>
-              <a:rPr lang="en-US" altLang="zh-CN" dirty="0"/>
-              <a:t>06- Mad World (Remix)</a:t>
-            </a:r>
-          </a:p>
-          <a:p>
-            <a:pPr marL="0" indent="0">
-              <a:buNone/>
-            </a:pPr>
-            <a:r>
-              <a:rPr lang="en-US" altLang="zh-CN" dirty="0"/>
-              <a:t>07-</a:t>
-            </a:r>
-            <a:r>
-              <a:rPr lang="ja-JP" altLang="en-US" dirty="0"/>
-              <a:t>ドルフィンみさき </a:t>
-            </a:r>
-            <a:r>
-              <a:rPr lang="en-US" altLang="ja-JP" dirty="0"/>
-              <a:t>- </a:t>
-            </a:r>
-            <a:r>
-              <a:rPr lang="ja-JP" altLang="en-US" dirty="0"/>
-              <a:t>地上</a:t>
-            </a:r>
-            <a:endParaRPr lang="en-US" altLang="ja-JP" dirty="0"/>
-          </a:p>
-          <a:p>
-            <a:pPr marL="0" indent="0">
-              <a:buNone/>
-            </a:pPr>
-            <a:r>
-              <a:rPr lang="en-US" altLang="zh-CN" dirty="0">
-                <a:highlight>
-                  <a:srgbClr val="00FFFF"/>
-                </a:highlight>
-              </a:rPr>
-              <a:t>08-M. 55 : 1</a:t>
-            </a:r>
-          </a:p>
-          <a:p>
-            <a:pPr marL="0" indent="0">
-              <a:buNone/>
-            </a:pPr>
-            <a:r>
-              <a:rPr lang="en-US" altLang="zh-CN" dirty="0"/>
-              <a:t>09-Meant To Be (Remix)</a:t>
-            </a:r>
-          </a:p>
-          <a:p>
-            <a:pPr marL="0" indent="0">
-              <a:buNone/>
-            </a:pPr>
-            <a:r>
-              <a:rPr lang="en-US" altLang="zh-CN" dirty="0"/>
-              <a:t>10-Loretta</a:t>
-            </a:r>
-          </a:p>
-          <a:p>
-            <a:endParaRPr lang="zh-CN" altLang="en-US" dirty="0"/>
-          </a:p>
-        </p:txBody>
-      </p:sp>
-      <p:pic>
-        <p:nvPicPr>
-          <p:cNvPr id="4" name="图片 3">
-            <a:extLst>
-              <a:ext uri="{FF2B5EF4-FFF2-40B4-BE49-F238E27FC236}">
-                <a16:creationId xmlns:a16="http://schemas.microsoft.com/office/drawing/2014/main" id="{95A3B700-5B17-4387-8F41-83FC9CA2AB0C}"/>
-              </a:ext>
-            </a:extLst>
-          </p:cNvPr>
-          <p:cNvPicPr>
-            <a:picLocks noChangeAspect="1"/>
-          </p:cNvPicPr>
-          <p:nvPr/>
-        </p:nvPicPr>
-        <p:blipFill>
-          <a:blip r:embed="rId2"/>
-          <a:stretch>
-            <a:fillRect/>
-          </a:stretch>
-        </p:blipFill>
-        <p:spPr>
-          <a:xfrm>
-            <a:off x="6653752" y="1102936"/>
-            <a:ext cx="5538248" cy="4652128"/>
-          </a:xfrm>
-          <a:prstGeom prst="rect">
-            <a:avLst/>
-          </a:prstGeom>
-        </p:spPr>
-      </p:pic>
-      <p:pic>
-        <p:nvPicPr>
-          <p:cNvPr id="5" name="图片 4">
-            <a:extLst>
-              <a:ext uri="{FF2B5EF4-FFF2-40B4-BE49-F238E27FC236}">
-                <a16:creationId xmlns:a16="http://schemas.microsoft.com/office/drawing/2014/main" id="{296A80ED-316A-4C76-989A-A71C15CEC4D5}"/>
-              </a:ext>
-            </a:extLst>
-          </p:cNvPr>
-          <p:cNvPicPr>
-            <a:picLocks noChangeAspect="1"/>
-          </p:cNvPicPr>
-          <p:nvPr/>
-        </p:nvPicPr>
-        <p:blipFill rotWithShape="1">
-          <a:blip r:embed="rId3"/>
-          <a:srcRect l="27617" t="-870" r="37927" b="34348"/>
-          <a:stretch/>
-        </p:blipFill>
-        <p:spPr>
-          <a:xfrm>
-            <a:off x="5573699" y="1199686"/>
-            <a:ext cx="1080053" cy="1251878"/>
-          </a:xfrm>
-          <a:prstGeom prst="rect">
-            <a:avLst/>
-          </a:prstGeom>
-        </p:spPr>
-      </p:pic>
-    </p:spTree>
-    <p:extLst>
-      <p:ext uri="{BB962C8B-B14F-4D97-AF65-F5344CB8AC3E}">
-        <p14:creationId xmlns:p14="http://schemas.microsoft.com/office/powerpoint/2010/main" val="3402901399"/>
-      </p:ext>
-    </p:extLst>
-  </p:cSld>
-  <p:clrMapOvr>
-    <a:masterClrMapping/>
-  </p:clrMapOvr>
-</p:sld>
-</file>
-
-<file path=ppt/slides/slide15.xml><?xml version="1.0" encoding="utf-8"?>
-<p:sld xmlns:a="http://schemas.openxmlformats.org/drawingml/2006/main" xmlns:r="http://schemas.openxmlformats.org/officeDocument/2006/relationships" xmlns:p="http://schemas.openxmlformats.org/presentationml/2006/main">
-  <p:cSld>
-    <p:spTree>
-      <p:nvGrpSpPr>
-        <p:cNvPr id="1" name=""/>
-        <p:cNvGrpSpPr/>
-        <p:nvPr/>
-      </p:nvGrpSpPr>
-      <p:grpSpPr>
-        <a:xfrm>
-          <a:off x="0" y="0"/>
-          <a:ext cx="0" cy="0"/>
-          <a:chOff x="0" y="0"/>
-          <a:chExt cx="0" cy="0"/>
-        </a:xfrm>
-      </p:grpSpPr>
-      <p:sp>
-        <p:nvSpPr>
-          <p:cNvPr id="2" name="标题 1">
-            <a:extLst>
-              <a:ext uri="{FF2B5EF4-FFF2-40B4-BE49-F238E27FC236}">
-                <a16:creationId xmlns:a16="http://schemas.microsoft.com/office/drawing/2014/main" id="{91ABC539-E50B-4BED-8076-BFB2F8413F20}"/>
-              </a:ext>
-            </a:extLst>
-          </p:cNvPr>
-          <p:cNvSpPr>
-            <a:spLocks noGrp="1"/>
-          </p:cNvSpPr>
-          <p:nvPr>
-            <p:ph type="title"/>
-          </p:nvPr>
-        </p:nvSpPr>
-        <p:spPr/>
-        <p:txBody>
-          <a:bodyPr/>
-          <a:lstStyle/>
-          <a:p>
-            <a:r>
-              <a:rPr lang="en-US" altLang="zh-CN" dirty="0"/>
-              <a:t>2024</a:t>
-            </a:r>
-            <a:r>
-              <a:rPr lang="zh-CN" altLang="en-US" dirty="0"/>
-              <a:t>年度歌单 </a:t>
-            </a:r>
-            <a:r>
-              <a:rPr lang="en-US" altLang="zh-CN" dirty="0"/>
-              <a:t>10/10</a:t>
-            </a:r>
-            <a:endParaRPr lang="zh-CN" altLang="en-US" dirty="0"/>
-          </a:p>
-        </p:txBody>
-      </p:sp>
-      <p:sp>
-        <p:nvSpPr>
-          <p:cNvPr id="3" name="内容占位符 2">
-            <a:extLst>
-              <a:ext uri="{FF2B5EF4-FFF2-40B4-BE49-F238E27FC236}">
-                <a16:creationId xmlns:a16="http://schemas.microsoft.com/office/drawing/2014/main" id="{45592CE2-370D-465C-921E-9859141890F6}"/>
-              </a:ext>
-            </a:extLst>
-          </p:cNvPr>
-          <p:cNvSpPr>
-            <a:spLocks noGrp="1"/>
-          </p:cNvSpPr>
-          <p:nvPr>
-            <p:ph idx="1"/>
-          </p:nvPr>
-        </p:nvSpPr>
-        <p:spPr>
-          <a:xfrm>
-            <a:off x="838200" y="1825625"/>
-            <a:ext cx="5682916" cy="4351338"/>
-          </a:xfrm>
-        </p:spPr>
-        <p:txBody>
-          <a:bodyPr>
-            <a:normAutofit/>
-          </a:bodyPr>
-          <a:lstStyle/>
-          <a:p>
-            <a:pPr marL="0" indent="0">
-              <a:buNone/>
-            </a:pPr>
-            <a:r>
-              <a:rPr lang="zh-CN" altLang="en-US" dirty="0"/>
-              <a:t>终于认识到</a:t>
-            </a:r>
-            <a:r>
-              <a:rPr lang="en-US" altLang="zh-CN" dirty="0" err="1">
-                <a:highlight>
-                  <a:srgbClr val="00FF00"/>
-                </a:highlight>
-              </a:rPr>
-              <a:t>DnB</a:t>
-            </a:r>
-            <a:r>
-              <a:rPr lang="zh-CN" altLang="en-US" dirty="0"/>
-              <a:t>的好了</a:t>
-            </a:r>
-            <a:r>
-              <a:rPr lang="en-US" altLang="zh-CN" dirty="0"/>
-              <a:t>, </a:t>
-            </a:r>
-            <a:r>
-              <a:rPr lang="zh-CN" altLang="en-US" dirty="0"/>
-              <a:t>主要听</a:t>
-            </a:r>
-            <a:endParaRPr lang="en-US" altLang="zh-CN" dirty="0"/>
-          </a:p>
-          <a:p>
-            <a:pPr marL="0" indent="0">
-              <a:buNone/>
-            </a:pPr>
-            <a:r>
-              <a:rPr lang="en-US" altLang="zh-CN" dirty="0"/>
-              <a:t>Hospital</a:t>
-            </a:r>
-            <a:r>
-              <a:rPr lang="zh-CN" altLang="en-US" dirty="0"/>
-              <a:t>电台</a:t>
-            </a:r>
-            <a:r>
-              <a:rPr lang="en-US" altLang="zh-CN" dirty="0"/>
-              <a:t>; </a:t>
-            </a:r>
-            <a:r>
-              <a:rPr lang="zh-CN" altLang="en-US" dirty="0"/>
-              <a:t> </a:t>
-            </a:r>
-            <a:r>
-              <a:rPr lang="zh-CN" altLang="en-US" dirty="0">
-                <a:highlight>
-                  <a:srgbClr val="00FFFF"/>
-                </a:highlight>
-              </a:rPr>
-              <a:t>古典</a:t>
-            </a:r>
-            <a:r>
-              <a:rPr lang="zh-CN" altLang="en-US" dirty="0"/>
-              <a:t>钢琴不拘束于听</a:t>
-            </a:r>
-            <a:r>
-              <a:rPr lang="en-US" altLang="zh-CN" dirty="0"/>
-              <a:t>Kapustin, </a:t>
-            </a:r>
-            <a:r>
-              <a:rPr lang="zh-CN" altLang="en-US" dirty="0"/>
-              <a:t> </a:t>
-            </a:r>
-            <a:r>
-              <a:rPr lang="en-US" altLang="zh-CN" dirty="0"/>
-              <a:t>25</a:t>
-            </a:r>
-            <a:r>
-              <a:rPr lang="zh-CN" altLang="en-US" dirty="0"/>
-              <a:t>年的歌单里可能会有更多非</a:t>
-            </a:r>
-            <a:r>
-              <a:rPr lang="en-US" altLang="zh-CN" dirty="0"/>
-              <a:t>K</a:t>
-            </a:r>
-            <a:r>
-              <a:rPr lang="zh-CN" altLang="en-US" dirty="0"/>
-              <a:t>作品</a:t>
-            </a:r>
-            <a:r>
-              <a:rPr lang="en-US" altLang="zh-CN" dirty="0"/>
-              <a:t>[</a:t>
-            </a:r>
-            <a:r>
-              <a:rPr lang="zh-CN" altLang="en-US" dirty="0"/>
-              <a:t>这一点预言得极其正确</a:t>
-            </a:r>
-            <a:r>
-              <a:rPr lang="en-US" altLang="zh-CN" dirty="0"/>
-              <a:t>]; </a:t>
-            </a:r>
-            <a:r>
-              <a:rPr lang="zh-CN" altLang="en-US" dirty="0"/>
-              <a:t> 电子、爵士、流行等品味没怎么变</a:t>
-            </a:r>
-            <a:r>
-              <a:rPr lang="en-US" altLang="zh-CN" dirty="0"/>
-              <a:t>, </a:t>
-            </a:r>
-            <a:r>
-              <a:rPr lang="zh-CN" altLang="en-US" dirty="0"/>
-              <a:t>现在很难听到新歌了</a:t>
-            </a:r>
-            <a:r>
-              <a:rPr lang="en-US" altLang="zh-CN" dirty="0"/>
-              <a:t>. </a:t>
-            </a:r>
-          </a:p>
-        </p:txBody>
-      </p:sp>
-      <p:pic>
-        <p:nvPicPr>
-          <p:cNvPr id="4" name="图片 3">
-            <a:extLst>
-              <a:ext uri="{FF2B5EF4-FFF2-40B4-BE49-F238E27FC236}">
-                <a16:creationId xmlns:a16="http://schemas.microsoft.com/office/drawing/2014/main" id="{95A3B700-5B17-4387-8F41-83FC9CA2AB0C}"/>
-              </a:ext>
-            </a:extLst>
-          </p:cNvPr>
-          <p:cNvPicPr>
-            <a:picLocks noChangeAspect="1"/>
-          </p:cNvPicPr>
-          <p:nvPr/>
-        </p:nvPicPr>
-        <p:blipFill>
-          <a:blip r:embed="rId2"/>
-          <a:stretch>
-            <a:fillRect/>
-          </a:stretch>
-        </p:blipFill>
-        <p:spPr>
-          <a:xfrm>
-            <a:off x="6653752" y="1102936"/>
-            <a:ext cx="5538248" cy="4652128"/>
-          </a:xfrm>
-          <a:prstGeom prst="rect">
-            <a:avLst/>
-          </a:prstGeom>
-        </p:spPr>
-      </p:pic>
-    </p:spTree>
-    <p:extLst>
-      <p:ext uri="{BB962C8B-B14F-4D97-AF65-F5344CB8AC3E}">
-        <p14:creationId xmlns:p14="http://schemas.microsoft.com/office/powerpoint/2010/main" val="3652756046"/>
-      </p:ext>
-    </p:extLst>
-  </p:cSld>
-  <p:clrMapOvr>
-    <a:masterClrMapping/>
-  </p:clrMapOvr>
-</p:sld>
-</file>
-
-<file path=ppt/slides/slide16.xml><?xml version="1.0" encoding="utf-8"?>
-<p:sld xmlns:a="http://schemas.openxmlformats.org/drawingml/2006/main" xmlns:r="http://schemas.openxmlformats.org/officeDocument/2006/relationships" xmlns:p="http://schemas.openxmlformats.org/presentationml/2006/main">
-  <p:cSld>
-    <p:spTree>
-      <p:nvGrpSpPr>
-        <p:cNvPr id="1" name="">
-          <a:extLst>
-            <a:ext uri="{FF2B5EF4-FFF2-40B4-BE49-F238E27FC236}">
-              <a16:creationId xmlns:a16="http://schemas.microsoft.com/office/drawing/2014/main" id="{41AD9585-4EE7-8C46-F329-2A59292A88B5}"/>
-            </a:ext>
-          </a:extLst>
-        </p:cNvPr>
-        <p:cNvGrpSpPr/>
-        <p:nvPr/>
-      </p:nvGrpSpPr>
-      <p:grpSpPr>
-        <a:xfrm>
-          <a:off x="0" y="0"/>
-          <a:ext cx="0" cy="0"/>
-          <a:chOff x="0" y="0"/>
-          <a:chExt cx="0" cy="0"/>
-        </a:xfrm>
-      </p:grpSpPr>
-      <p:sp>
-        <p:nvSpPr>
-          <p:cNvPr id="2" name="标题 1">
-            <a:extLst>
-              <a:ext uri="{FF2B5EF4-FFF2-40B4-BE49-F238E27FC236}">
-                <a16:creationId xmlns:a16="http://schemas.microsoft.com/office/drawing/2014/main" id="{BDA14F93-A15E-F68A-EB37-41FEE87F4DBD}"/>
-              </a:ext>
-            </a:extLst>
-          </p:cNvPr>
-          <p:cNvSpPr>
-            <a:spLocks noGrp="1"/>
-          </p:cNvSpPr>
-          <p:nvPr>
-            <p:ph type="title"/>
-          </p:nvPr>
-        </p:nvSpPr>
-        <p:spPr/>
-        <p:txBody>
-          <a:bodyPr/>
-          <a:lstStyle/>
-          <a:p>
-            <a:r>
-              <a:rPr lang="en-US" altLang="zh-CN" dirty="0"/>
-              <a:t>2025</a:t>
-            </a:r>
-            <a:r>
-              <a:rPr lang="zh-CN" altLang="en-US" dirty="0"/>
-              <a:t>年度歌单 </a:t>
-            </a:r>
-            <a:r>
-              <a:rPr lang="en-US" altLang="zh-CN" dirty="0"/>
-              <a:t>10/10</a:t>
-            </a:r>
-            <a:endParaRPr lang="zh-CN" altLang="en-US" dirty="0"/>
-          </a:p>
-        </p:txBody>
-      </p:sp>
-      <p:pic>
-        <p:nvPicPr>
-          <p:cNvPr id="5" name="图片 4">
-            <a:extLst>
-              <a:ext uri="{FF2B5EF4-FFF2-40B4-BE49-F238E27FC236}">
-                <a16:creationId xmlns:a16="http://schemas.microsoft.com/office/drawing/2014/main" id="{6752154C-C969-25EE-92FF-982A5F5F9DA4}"/>
-              </a:ext>
-            </a:extLst>
-          </p:cNvPr>
-          <p:cNvPicPr>
-            <a:picLocks noChangeAspect="1"/>
-          </p:cNvPicPr>
-          <p:nvPr/>
-        </p:nvPicPr>
-        <p:blipFill rotWithShape="1">
-          <a:blip r:embed="rId2"/>
-          <a:srcRect l="27617" t="-870" r="37927" b="34348"/>
-          <a:stretch/>
-        </p:blipFill>
-        <p:spPr>
-          <a:xfrm>
-            <a:off x="8268773" y="1825625"/>
-            <a:ext cx="1080053" cy="1251878"/>
-          </a:xfrm>
-          <a:prstGeom prst="rect">
-            <a:avLst/>
-          </a:prstGeom>
-        </p:spPr>
-      </p:pic>
-      <p:pic>
-        <p:nvPicPr>
-          <p:cNvPr id="7" name="图片 6" descr="图形用户界面, 文本, 应用程序, 电子邮件&#10;&#10;AI 生成的内容可能不正确。">
-            <a:extLst>
-              <a:ext uri="{FF2B5EF4-FFF2-40B4-BE49-F238E27FC236}">
-                <a16:creationId xmlns:a16="http://schemas.microsoft.com/office/drawing/2014/main" id="{AF172534-9763-CF1D-4CF0-5AA13BA5514D}"/>
-              </a:ext>
-            </a:extLst>
-          </p:cNvPr>
-          <p:cNvPicPr>
-            <a:picLocks noChangeAspect="1"/>
-          </p:cNvPicPr>
-          <p:nvPr/>
-        </p:nvPicPr>
-        <p:blipFill>
-          <a:blip r:embed="rId3">
-            <a:extLst>
-              <a:ext uri="{28A0092B-C50C-407E-A947-70E740481C1C}">
-                <a14:useLocalDpi xmlns:a14="http://schemas.microsoft.com/office/drawing/2010/main" val="0"/>
-              </a:ext>
-            </a:extLst>
-          </a:blip>
-          <a:srcRect r="49484"/>
-          <a:stretch>
-            <a:fillRect/>
-          </a:stretch>
-        </p:blipFill>
-        <p:spPr>
-          <a:xfrm>
-            <a:off x="7690810" y="-462"/>
-            <a:ext cx="4501190" cy="6858462"/>
-          </a:xfrm>
-          <a:prstGeom prst="rect">
-            <a:avLst/>
-          </a:prstGeom>
-        </p:spPr>
-      </p:pic>
-      <p:sp>
-        <p:nvSpPr>
-          <p:cNvPr id="3" name="内容占位符 2">
-            <a:extLst>
-              <a:ext uri="{FF2B5EF4-FFF2-40B4-BE49-F238E27FC236}">
-                <a16:creationId xmlns:a16="http://schemas.microsoft.com/office/drawing/2014/main" id="{D950820C-A7DC-C248-F775-6D5B2C13C2DF}"/>
-              </a:ext>
-            </a:extLst>
-          </p:cNvPr>
-          <p:cNvSpPr>
-            <a:spLocks noGrp="1"/>
-          </p:cNvSpPr>
-          <p:nvPr>
-            <p:ph idx="1"/>
-          </p:nvPr>
-        </p:nvSpPr>
-        <p:spPr/>
-        <p:txBody>
-          <a:bodyPr>
-            <a:normAutofit fontScale="92500" lnSpcReduction="20000"/>
-          </a:bodyPr>
-          <a:lstStyle/>
-          <a:p>
-            <a:pPr marL="0" indent="0">
-              <a:buNone/>
-            </a:pPr>
-            <a:r>
-              <a:rPr lang="en-US" altLang="zh-CN" dirty="0">
-                <a:highlight>
-                  <a:srgbClr val="00FFFF"/>
-                </a:highlight>
-              </a:rPr>
-              <a:t>01-</a:t>
-            </a:r>
-            <a:r>
-              <a:rPr lang="en" altLang="zh-CN" dirty="0">
-                <a:highlight>
-                  <a:srgbClr val="00FFFF"/>
-                </a:highlight>
-              </a:rPr>
-              <a:t>Violin Sonata in A Major,  FWV 8:II.</a:t>
-            </a:r>
-            <a:r>
-              <a:rPr lang="zh-CN" altLang="en-US" dirty="0">
-                <a:highlight>
-                  <a:srgbClr val="00FFFF"/>
-                </a:highlight>
-              </a:rPr>
-              <a:t> </a:t>
-            </a:r>
-            <a:r>
-              <a:rPr lang="en-US" altLang="zh-CN" dirty="0">
-                <a:highlight>
-                  <a:srgbClr val="00FFFF"/>
-                </a:highlight>
-              </a:rPr>
-              <a:t>Allegro</a:t>
-            </a:r>
-          </a:p>
-          <a:p>
-            <a:pPr marL="0" indent="0">
-              <a:buNone/>
-            </a:pPr>
-            <a:r>
-              <a:rPr lang="en-US" altLang="zh-CN" dirty="0"/>
-              <a:t>02-Overcompensate</a:t>
-            </a:r>
-          </a:p>
-          <a:p>
-            <a:pPr marL="0" indent="0">
-              <a:buNone/>
-            </a:pPr>
-            <a:r>
-              <a:rPr lang="en-US" altLang="zh-CN" dirty="0">
-                <a:highlight>
-                  <a:srgbClr val="00FFFF"/>
-                </a:highlight>
-              </a:rPr>
-              <a:t>03-Piano Sonata No. 4 in F-Sharp Major,  Op. 30</a:t>
-            </a:r>
-          </a:p>
-          <a:p>
-            <a:pPr marL="0" indent="0">
-              <a:buNone/>
-            </a:pPr>
-            <a:r>
-              <a:rPr lang="en-US" altLang="zh-CN" dirty="0">
-                <a:highlight>
-                  <a:srgbClr val="00FF00"/>
-                </a:highlight>
-              </a:rPr>
-              <a:t>04-Skycraping</a:t>
-            </a:r>
-          </a:p>
-          <a:p>
-            <a:pPr marL="0" indent="0">
-              <a:buNone/>
-            </a:pPr>
-            <a:r>
-              <a:rPr lang="en-US" altLang="zh-CN" dirty="0">
-                <a:highlight>
-                  <a:srgbClr val="00FF00"/>
-                </a:highlight>
-              </a:rPr>
-              <a:t>05-Wading</a:t>
-            </a:r>
-            <a:r>
-              <a:rPr lang="zh-CN" altLang="en-US" dirty="0">
-                <a:highlight>
-                  <a:srgbClr val="00FF00"/>
-                </a:highlight>
-              </a:rPr>
-              <a:t> </a:t>
-            </a:r>
-            <a:r>
-              <a:rPr lang="en-US" altLang="zh-CN" dirty="0">
-                <a:highlight>
-                  <a:srgbClr val="00FF00"/>
-                </a:highlight>
-              </a:rPr>
-              <a:t>Through</a:t>
-            </a:r>
-            <a:r>
-              <a:rPr lang="zh-CN" altLang="en-US" dirty="0">
-                <a:highlight>
-                  <a:srgbClr val="00FF00"/>
-                </a:highlight>
-              </a:rPr>
-              <a:t> </a:t>
-            </a:r>
-            <a:r>
-              <a:rPr lang="en-US" altLang="zh-CN" dirty="0">
-                <a:highlight>
-                  <a:srgbClr val="00FF00"/>
-                </a:highlight>
-              </a:rPr>
-              <a:t>The</a:t>
-            </a:r>
-            <a:r>
-              <a:rPr lang="zh-CN" altLang="en-US" dirty="0">
-                <a:highlight>
-                  <a:srgbClr val="00FF00"/>
-                </a:highlight>
-              </a:rPr>
-              <a:t> </a:t>
-            </a:r>
-            <a:r>
-              <a:rPr lang="en-US" altLang="zh-CN" dirty="0">
-                <a:highlight>
-                  <a:srgbClr val="00FF00"/>
-                </a:highlight>
-              </a:rPr>
-              <a:t>Crowds</a:t>
-            </a:r>
-            <a:r>
-              <a:rPr lang="zh-CN" altLang="en-US" dirty="0">
-                <a:highlight>
-                  <a:srgbClr val="00FF00"/>
-                </a:highlight>
-              </a:rPr>
-              <a:t> 蝉联</a:t>
-            </a:r>
-            <a:endParaRPr lang="en-US" altLang="zh-CN" dirty="0">
-              <a:highlight>
-                <a:srgbClr val="00FF00"/>
-              </a:highlight>
-            </a:endParaRPr>
-          </a:p>
-          <a:p>
-            <a:pPr marL="0" indent="0">
-              <a:buNone/>
-            </a:pPr>
-            <a:r>
-              <a:rPr lang="en-US" altLang="zh-CN" dirty="0">
-                <a:highlight>
-                  <a:srgbClr val="00FF00"/>
-                </a:highlight>
-              </a:rPr>
-              <a:t>06-Basic</a:t>
-            </a:r>
-            <a:r>
-              <a:rPr lang="zh-CN" altLang="en-US" dirty="0">
-                <a:highlight>
-                  <a:srgbClr val="00FF00"/>
-                </a:highlight>
-              </a:rPr>
-              <a:t> </a:t>
-            </a:r>
-            <a:r>
-              <a:rPr lang="en-US" altLang="zh-CN" dirty="0">
-                <a:highlight>
-                  <a:srgbClr val="00FF00"/>
-                </a:highlight>
-              </a:rPr>
-              <a:t>Instinct</a:t>
-            </a:r>
-          </a:p>
-          <a:p>
-            <a:pPr marL="0" indent="0">
-              <a:buNone/>
-            </a:pPr>
-            <a:r>
-              <a:rPr lang="en-US" altLang="zh-CN" dirty="0">
-                <a:highlight>
-                  <a:srgbClr val="00FFFF"/>
-                </a:highlight>
-              </a:rPr>
-              <a:t>07-Kreisleriana,  Op. 16:IV. Sehr </a:t>
-            </a:r>
-            <a:r>
-              <a:rPr lang="en-US" altLang="zh-CN" dirty="0" err="1">
-                <a:highlight>
-                  <a:srgbClr val="00FFFF"/>
-                </a:highlight>
-              </a:rPr>
-              <a:t>langsam</a:t>
-            </a:r>
-            <a:endParaRPr lang="en-US" altLang="zh-CN" dirty="0">
-              <a:highlight>
-                <a:srgbClr val="00FFFF"/>
-              </a:highlight>
-            </a:endParaRPr>
-          </a:p>
-          <a:p>
-            <a:pPr marL="0" indent="0">
-              <a:buNone/>
-            </a:pPr>
-            <a:r>
-              <a:rPr lang="en-US" altLang="zh-CN" dirty="0"/>
-              <a:t>08-</a:t>
-            </a:r>
-            <a:r>
-              <a:rPr lang="zh-CN" altLang="en-US" dirty="0"/>
-              <a:t>魔镜</a:t>
-            </a:r>
-            <a:endParaRPr lang="en-US" altLang="zh-CN" dirty="0"/>
-          </a:p>
-          <a:p>
-            <a:pPr marL="0" indent="0">
-              <a:buNone/>
-            </a:pPr>
-            <a:r>
-              <a:rPr lang="en-US" altLang="zh-CN" dirty="0">
-                <a:highlight>
-                  <a:srgbClr val="FFFF00"/>
-                </a:highlight>
-              </a:rPr>
-              <a:t>09-</a:t>
-            </a:r>
-            <a:r>
-              <a:rPr lang="ja-JP" altLang="en-US" dirty="0">
-                <a:highlight>
-                  <a:srgbClr val="FFFF00"/>
-                </a:highlight>
-              </a:rPr>
-              <a:t>ドルフィンみさき </a:t>
-            </a:r>
-            <a:r>
-              <a:rPr lang="en-US" altLang="ja-JP" dirty="0">
-                <a:highlight>
-                  <a:srgbClr val="FFFF00"/>
-                </a:highlight>
-              </a:rPr>
-              <a:t>- </a:t>
-            </a:r>
-            <a:r>
-              <a:rPr lang="ja-JP" altLang="en-US">
-                <a:highlight>
-                  <a:srgbClr val="FFFF00"/>
-                </a:highlight>
-              </a:rPr>
-              <a:t>地上</a:t>
-            </a:r>
-            <a:r>
-              <a:rPr lang="zh-CN" altLang="en-US" dirty="0">
-                <a:highlight>
-                  <a:srgbClr val="FFFF00"/>
-                </a:highlight>
-              </a:rPr>
-              <a:t> 蝉联</a:t>
-            </a:r>
-            <a:endParaRPr lang="en-US" altLang="ja-JP" dirty="0">
-              <a:highlight>
-                <a:srgbClr val="FFFF00"/>
-              </a:highlight>
-            </a:endParaRPr>
-          </a:p>
-          <a:p>
-            <a:pPr marL="0" indent="0">
-              <a:buNone/>
-            </a:pPr>
-            <a:r>
-              <a:rPr lang="en-US" altLang="zh-CN" dirty="0">
-                <a:highlight>
-                  <a:srgbClr val="00FF00"/>
-                </a:highlight>
-              </a:rPr>
-              <a:t>10-Caffeine</a:t>
-            </a:r>
-            <a:endParaRPr lang="zh-CN" altLang="en-US" dirty="0">
-              <a:highlight>
-                <a:srgbClr val="00FF00"/>
-              </a:highlight>
-            </a:endParaRPr>
-          </a:p>
-        </p:txBody>
-      </p:sp>
-      <p:pic>
-        <p:nvPicPr>
-          <p:cNvPr id="9" name="图片 8">
-            <a:extLst>
-              <a:ext uri="{FF2B5EF4-FFF2-40B4-BE49-F238E27FC236}">
-                <a16:creationId xmlns:a16="http://schemas.microsoft.com/office/drawing/2014/main" id="{154EF1BF-9434-BE1F-6CF1-2FE333E553E7}"/>
-              </a:ext>
-            </a:extLst>
-          </p:cNvPr>
-          <p:cNvPicPr>
-            <a:picLocks noChangeAspect="1"/>
-          </p:cNvPicPr>
-          <p:nvPr/>
-        </p:nvPicPr>
-        <p:blipFill rotWithShape="1">
-          <a:blip r:embed="rId2"/>
-          <a:srcRect l="27617" t="-870" r="37927" b="34348"/>
-          <a:stretch/>
-        </p:blipFill>
-        <p:spPr>
-          <a:xfrm>
-            <a:off x="6096000" y="4639665"/>
-            <a:ext cx="1080053" cy="1251878"/>
-          </a:xfrm>
-          <a:prstGeom prst="rect">
-            <a:avLst/>
-          </a:prstGeom>
-        </p:spPr>
-      </p:pic>
-    </p:spTree>
-    <p:extLst>
-      <p:ext uri="{BB962C8B-B14F-4D97-AF65-F5344CB8AC3E}">
-        <p14:creationId xmlns:p14="http://schemas.microsoft.com/office/powerpoint/2010/main" val="2992684989"/>
-      </p:ext>
-    </p:extLst>
-  </p:cSld>
-  <p:clrMapOvr>
-    <a:masterClrMapping/>
-  </p:clrMapOvr>
-</p:sld>
-</file>
-
-<file path=ppt/slides/slide17.xml><?xml version="1.0" encoding="utf-8"?>
-<p:sld xmlns:a="http://schemas.openxmlformats.org/drawingml/2006/main" xmlns:r="http://schemas.openxmlformats.org/officeDocument/2006/relationships" xmlns:p="http://schemas.openxmlformats.org/presentationml/2006/main">
-  <p:cSld>
-    <p:spTree>
-      <p:nvGrpSpPr>
-        <p:cNvPr id="1" name="">
-          <a:extLst>
-            <a:ext uri="{FF2B5EF4-FFF2-40B4-BE49-F238E27FC236}">
-              <a16:creationId xmlns:a16="http://schemas.microsoft.com/office/drawing/2014/main" id="{61F5F61B-61EB-324B-E0ED-1D1CA36BDBE6}"/>
-            </a:ext>
-          </a:extLst>
-        </p:cNvPr>
-        <p:cNvGrpSpPr/>
-        <p:nvPr/>
-      </p:nvGrpSpPr>
-      <p:grpSpPr>
-        <a:xfrm>
-          <a:off x="0" y="0"/>
-          <a:ext cx="0" cy="0"/>
-          <a:chOff x="0" y="0"/>
-          <a:chExt cx="0" cy="0"/>
-        </a:xfrm>
-      </p:grpSpPr>
-      <p:sp>
-        <p:nvSpPr>
-          <p:cNvPr id="2" name="标题 1">
-            <a:extLst>
-              <a:ext uri="{FF2B5EF4-FFF2-40B4-BE49-F238E27FC236}">
-                <a16:creationId xmlns:a16="http://schemas.microsoft.com/office/drawing/2014/main" id="{1CEE5AEC-86DD-6909-BAD5-06FD0C50C1F1}"/>
-              </a:ext>
-            </a:extLst>
-          </p:cNvPr>
-          <p:cNvSpPr>
-            <a:spLocks noGrp="1"/>
-          </p:cNvSpPr>
-          <p:nvPr>
-            <p:ph type="title"/>
-          </p:nvPr>
-        </p:nvSpPr>
-        <p:spPr/>
-        <p:txBody>
-          <a:bodyPr/>
-          <a:lstStyle/>
-          <a:p>
-            <a:r>
-              <a:rPr lang="en-US" altLang="zh-CN" dirty="0"/>
-              <a:t>2025</a:t>
-            </a:r>
-            <a:r>
-              <a:rPr lang="zh-CN" altLang="en-US" dirty="0"/>
-              <a:t>年度歌单 </a:t>
-            </a:r>
-            <a:r>
-              <a:rPr lang="en-US" altLang="zh-CN" dirty="0"/>
-              <a:t>10/10</a:t>
-            </a:r>
-            <a:endParaRPr lang="zh-CN" altLang="en-US" dirty="0"/>
-          </a:p>
-        </p:txBody>
-      </p:sp>
-      <p:pic>
-        <p:nvPicPr>
-          <p:cNvPr id="5" name="图片 4">
-            <a:extLst>
-              <a:ext uri="{FF2B5EF4-FFF2-40B4-BE49-F238E27FC236}">
-                <a16:creationId xmlns:a16="http://schemas.microsoft.com/office/drawing/2014/main" id="{5A8534C6-1277-9568-1DDE-F36070C907F3}"/>
-              </a:ext>
-            </a:extLst>
-          </p:cNvPr>
-          <p:cNvPicPr>
-            <a:picLocks noChangeAspect="1"/>
-          </p:cNvPicPr>
-          <p:nvPr/>
-        </p:nvPicPr>
-        <p:blipFill rotWithShape="1">
-          <a:blip r:embed="rId2"/>
-          <a:srcRect l="27617" t="-870" r="37927" b="34348"/>
-          <a:stretch/>
-        </p:blipFill>
-        <p:spPr>
-          <a:xfrm>
-            <a:off x="8268773" y="1825625"/>
-            <a:ext cx="1080053" cy="1251878"/>
-          </a:xfrm>
-          <a:prstGeom prst="rect">
-            <a:avLst/>
-          </a:prstGeom>
-        </p:spPr>
-      </p:pic>
-      <p:pic>
-        <p:nvPicPr>
-          <p:cNvPr id="7" name="图片 6" descr="图形用户界面, 文本, 应用程序, 电子邮件&#10;&#10;AI 生成的内容可能不正确。">
-            <a:extLst>
-              <a:ext uri="{FF2B5EF4-FFF2-40B4-BE49-F238E27FC236}">
-                <a16:creationId xmlns:a16="http://schemas.microsoft.com/office/drawing/2014/main" id="{3FCC0458-D642-C0DE-0539-3CAC50ADA2F2}"/>
-              </a:ext>
-            </a:extLst>
-          </p:cNvPr>
-          <p:cNvPicPr>
-            <a:picLocks noChangeAspect="1"/>
-          </p:cNvPicPr>
-          <p:nvPr/>
-        </p:nvPicPr>
-        <p:blipFill>
-          <a:blip r:embed="rId3">
-            <a:extLst>
-              <a:ext uri="{28A0092B-C50C-407E-A947-70E740481C1C}">
-                <a14:useLocalDpi xmlns:a14="http://schemas.microsoft.com/office/drawing/2010/main" val="0"/>
-              </a:ext>
-            </a:extLst>
-          </a:blip>
-          <a:srcRect r="49484"/>
-          <a:stretch>
-            <a:fillRect/>
-          </a:stretch>
-        </p:blipFill>
-        <p:spPr>
-          <a:xfrm>
-            <a:off x="7690810" y="-462"/>
-            <a:ext cx="4501190" cy="6858462"/>
-          </a:xfrm>
-          <a:prstGeom prst="rect">
-            <a:avLst/>
-          </a:prstGeom>
-        </p:spPr>
-      </p:pic>
-      <p:sp>
-        <p:nvSpPr>
-          <p:cNvPr id="3" name="内容占位符 2">
-            <a:extLst>
-              <a:ext uri="{FF2B5EF4-FFF2-40B4-BE49-F238E27FC236}">
-                <a16:creationId xmlns:a16="http://schemas.microsoft.com/office/drawing/2014/main" id="{2606F905-0264-0F85-A837-8BBB7531BC73}"/>
-              </a:ext>
-            </a:extLst>
-          </p:cNvPr>
-          <p:cNvSpPr>
-            <a:spLocks noGrp="1"/>
-          </p:cNvSpPr>
-          <p:nvPr>
-            <p:ph idx="1"/>
-          </p:nvPr>
-        </p:nvSpPr>
-        <p:spPr>
-          <a:xfrm>
-            <a:off x="838200" y="1825625"/>
-            <a:ext cx="6717632" cy="4351338"/>
-          </a:xfrm>
-        </p:spPr>
-        <p:txBody>
-          <a:bodyPr>
-            <a:normAutofit/>
-          </a:bodyPr>
-          <a:lstStyle/>
-          <a:p>
-            <a:pPr marL="0" indent="0">
-              <a:buNone/>
-            </a:pPr>
-            <a:r>
-              <a:rPr lang="zh-CN" altLang="en-US" dirty="0"/>
-              <a:t>古典的一年</a:t>
-            </a:r>
-            <a:r>
-              <a:rPr lang="en-US" altLang="zh-CN" dirty="0"/>
-              <a:t>, </a:t>
-            </a:r>
-            <a:r>
-              <a:rPr lang="zh-CN" altLang="en-US" dirty="0"/>
-              <a:t> 主要听了</a:t>
-            </a:r>
-            <a:r>
-              <a:rPr lang="zh-CN" altLang="en-US" dirty="0">
-                <a:highlight>
-                  <a:srgbClr val="00FFFF"/>
-                </a:highlight>
-              </a:rPr>
-              <a:t>古典</a:t>
-            </a:r>
-            <a:r>
-              <a:rPr lang="en-US" altLang="zh-CN" dirty="0"/>
-              <a:t>, </a:t>
-            </a:r>
-            <a:r>
-              <a:rPr lang="zh-CN" altLang="en-US" dirty="0"/>
-              <a:t> </a:t>
-            </a:r>
-            <a:r>
-              <a:rPr lang="en-US" altLang="zh-CN" dirty="0" err="1">
-                <a:highlight>
-                  <a:srgbClr val="00FF00"/>
-                </a:highlight>
-              </a:rPr>
-              <a:t>dnb</a:t>
-            </a:r>
-            <a:r>
-              <a:rPr lang="en-US" altLang="zh-CN" dirty="0"/>
-              <a:t>, </a:t>
-            </a:r>
-            <a:r>
-              <a:rPr lang="zh-CN" altLang="en-US" dirty="0"/>
-              <a:t> 爵士</a:t>
-            </a:r>
-            <a:r>
-              <a:rPr lang="en-US" altLang="zh-CN" dirty="0"/>
-              <a:t>, </a:t>
-            </a:r>
-            <a:r>
-              <a:rPr lang="zh-CN" altLang="en-US" dirty="0"/>
-              <a:t> </a:t>
-            </a:r>
-            <a:r>
-              <a:rPr lang="en-US" altLang="zh-CN" dirty="0"/>
-              <a:t>garage.</a:t>
-            </a:r>
-            <a:r>
-              <a:rPr lang="zh-CN" altLang="en-US" dirty="0"/>
-              <a:t> 很多歌都在跑步的时候听</a:t>
-            </a:r>
-            <a:r>
-              <a:rPr lang="en-US" altLang="zh-CN" dirty="0"/>
-              <a:t>.</a:t>
-            </a:r>
-          </a:p>
-          <a:p>
-            <a:pPr marL="0" indent="0">
-              <a:buNone/>
-            </a:pPr>
-            <a:endParaRPr lang="en-US" altLang="zh-CN" dirty="0"/>
-          </a:p>
-          <a:p>
-            <a:pPr marL="0" indent="0">
-              <a:buNone/>
-            </a:pPr>
-            <a:r>
-              <a:rPr lang="zh-CN" altLang="en-US" dirty="0"/>
-              <a:t>收集了</a:t>
-            </a:r>
-            <a:r>
-              <a:rPr lang="en-US" altLang="zh-CN" dirty="0"/>
-              <a:t>20</a:t>
-            </a:r>
-            <a:r>
-              <a:rPr lang="zh-CN" altLang="en-US" dirty="0"/>
-              <a:t>年精华选集</a:t>
-            </a:r>
-            <a:r>
-              <a:rPr lang="en-US" altLang="zh-CN" dirty="0"/>
-              <a:t>.</a:t>
-            </a:r>
-          </a:p>
-          <a:p>
-            <a:pPr marL="0" indent="0">
-              <a:buNone/>
-            </a:pPr>
-            <a:endParaRPr lang="en-US" altLang="zh-CN" dirty="0"/>
-          </a:p>
-          <a:p>
-            <a:pPr marL="0" indent="0">
-              <a:buNone/>
-            </a:pPr>
-            <a:r>
-              <a:rPr lang="zh-CN" altLang="en-US" dirty="0"/>
-              <a:t>一整年没编曲了</a:t>
-            </a:r>
-            <a:r>
-              <a:rPr lang="en-US" altLang="zh-CN" dirty="0"/>
-              <a:t>, </a:t>
-            </a:r>
-            <a:r>
-              <a:rPr lang="zh-CN" altLang="en-US" dirty="0"/>
-              <a:t> 不知道为什么</a:t>
-            </a:r>
-            <a:r>
-              <a:rPr lang="en-US" altLang="zh-CN" dirty="0"/>
-              <a:t>.</a:t>
-            </a:r>
-          </a:p>
-        </p:txBody>
-      </p:sp>
-    </p:spTree>
-    <p:extLst>
-      <p:ext uri="{BB962C8B-B14F-4D97-AF65-F5344CB8AC3E}">
-        <p14:creationId xmlns:p14="http://schemas.microsoft.com/office/powerpoint/2010/main" val="3906664153"/>
-      </p:ext>
-    </p:extLst>
-  </p:cSld>
-  <p:clrMapOvr>
-    <a:masterClrMapping/>
-  </p:clrMapOvr>
-</p:sld>
-</file>
-
 <file path=ppt/slides/slide2.xml><?xml version="1.0" encoding="utf-8"?>
 <p:sld xmlns:a="http://schemas.openxmlformats.org/drawingml/2006/main" xmlns:r="http://schemas.openxmlformats.org/officeDocument/2006/relationships" xmlns:p="http://schemas.openxmlformats.org/presentationml/2006/main">
   <p:cSld>
@@ -5861,208 +3643,6 @@
           <p:cNvPr id="2" name="标题 1">
             <a:extLst>
               <a:ext uri="{FF2B5EF4-FFF2-40B4-BE49-F238E27FC236}">
-                <a16:creationId xmlns:a16="http://schemas.microsoft.com/office/drawing/2014/main" id="{11C23C8A-BBC7-4DA9-2B07-EF3DF8418B8B}"/>
-              </a:ext>
-            </a:extLst>
-          </p:cNvPr>
-          <p:cNvSpPr>
-            <a:spLocks noGrp="1"/>
-          </p:cNvSpPr>
-          <p:nvPr>
-            <p:ph type="title"/>
-          </p:nvPr>
-        </p:nvSpPr>
-        <p:spPr/>
-        <p:txBody>
-          <a:bodyPr/>
-          <a:lstStyle/>
-          <a:p>
-            <a:r>
-              <a:rPr lang="en-US" altLang="zh-CN" dirty="0"/>
-              <a:t>2018</a:t>
-            </a:r>
-            <a:r>
-              <a:rPr lang="zh-CN" altLang="en-US" dirty="0"/>
-              <a:t>年度歌单 </a:t>
-            </a:r>
-            <a:r>
-              <a:rPr lang="en-US" altLang="zh-CN" dirty="0"/>
-              <a:t>1/9</a:t>
-            </a:r>
-            <a:endParaRPr lang="zh-CN" altLang="en-US" dirty="0"/>
-          </a:p>
-        </p:txBody>
-      </p:sp>
-      <p:sp>
-        <p:nvSpPr>
-          <p:cNvPr id="3" name="内容占位符 2">
-            <a:extLst>
-              <a:ext uri="{FF2B5EF4-FFF2-40B4-BE49-F238E27FC236}">
-                <a16:creationId xmlns:a16="http://schemas.microsoft.com/office/drawing/2014/main" id="{42E92D6C-28E5-F918-F24D-BC8E36DE795F}"/>
-              </a:ext>
-            </a:extLst>
-          </p:cNvPr>
-          <p:cNvSpPr>
-            <a:spLocks noGrp="1"/>
-          </p:cNvSpPr>
-          <p:nvPr>
-            <p:ph idx="1"/>
-          </p:nvPr>
-        </p:nvSpPr>
-        <p:spPr>
-          <a:xfrm>
-            <a:off x="838200" y="1825625"/>
-            <a:ext cx="6795052" cy="4351338"/>
-          </a:xfrm>
-        </p:spPr>
-        <p:txBody>
-          <a:bodyPr/>
-          <a:lstStyle/>
-          <a:p>
-            <a:pPr marL="0" indent="0">
-              <a:buNone/>
-            </a:pPr>
-            <a:r>
-              <a:rPr lang="zh-CN" altLang="en-US" dirty="0"/>
-              <a:t>摸索的一年</a:t>
-            </a:r>
-            <a:r>
-              <a:rPr lang="en-US" altLang="zh-CN" dirty="0"/>
-              <a:t>, </a:t>
-            </a:r>
-            <a:r>
-              <a:rPr lang="zh-CN" altLang="en-US" dirty="0"/>
-              <a:t>准确把握</a:t>
-            </a:r>
-            <a:r>
-              <a:rPr lang="en-US" altLang="zh-CN" dirty="0"/>
-              <a:t>Seve</a:t>
-            </a:r>
-            <a:r>
-              <a:rPr lang="zh-CN" altLang="en-US" dirty="0"/>
-              <a:t>、</a:t>
-            </a:r>
-            <a:r>
-              <a:rPr lang="en-US" altLang="zh-CN" dirty="0"/>
-              <a:t>Friendships</a:t>
-            </a:r>
-            <a:r>
-              <a:rPr lang="zh-CN" altLang="en-US" dirty="0"/>
-              <a:t>等热曲</a:t>
-            </a:r>
-            <a:r>
-              <a:rPr lang="en-US" altLang="zh-CN" dirty="0"/>
-              <a:t>, </a:t>
-            </a:r>
-            <a:r>
-              <a:rPr lang="zh-CN" altLang="en-US" dirty="0"/>
-              <a:t>把</a:t>
-            </a:r>
-            <a:r>
-              <a:rPr lang="en-US" altLang="zh-CN" dirty="0" err="1"/>
-              <a:t>Axero</a:t>
-            </a:r>
-            <a:r>
-              <a:rPr lang="zh-CN" altLang="en-US" dirty="0"/>
-              <a:t>视为电子音乐之神</a:t>
-            </a:r>
-            <a:r>
-              <a:rPr lang="en-US" altLang="zh-CN" dirty="0"/>
-              <a:t>, </a:t>
-            </a:r>
-            <a:r>
-              <a:rPr lang="zh-CN" altLang="en-US" dirty="0"/>
-              <a:t>同时也抓住了真正的金曲</a:t>
-            </a:r>
-            <a:r>
-              <a:rPr lang="en-US" altLang="zh-CN" dirty="0"/>
-              <a:t>Chatterbox, </a:t>
-            </a:r>
-            <a:r>
-              <a:rPr lang="zh-CN" altLang="en-US" dirty="0"/>
-              <a:t>无与伦比的和弦与拥有超时代意义的</a:t>
-            </a:r>
-            <a:r>
-              <a:rPr lang="en-US" altLang="zh-CN" dirty="0"/>
-              <a:t>Future Bounce, </a:t>
-            </a:r>
-            <a:r>
-              <a:rPr lang="zh-CN" altLang="en-US" dirty="0"/>
-              <a:t>我们之后还会再见到它</a:t>
-            </a:r>
-            <a:r>
-              <a:rPr lang="en-US" altLang="zh-CN" dirty="0"/>
-              <a:t>?</a:t>
-            </a:r>
-            <a:endParaRPr lang="zh-CN" altLang="en-US" dirty="0"/>
-          </a:p>
-        </p:txBody>
-      </p:sp>
-      <p:pic>
-        <p:nvPicPr>
-          <p:cNvPr id="4" name="图片 3">
-            <a:extLst>
-              <a:ext uri="{FF2B5EF4-FFF2-40B4-BE49-F238E27FC236}">
-                <a16:creationId xmlns:a16="http://schemas.microsoft.com/office/drawing/2014/main" id="{433C67D9-CF59-C9F8-C23B-82D856F9F906}"/>
-              </a:ext>
-            </a:extLst>
-          </p:cNvPr>
-          <p:cNvPicPr>
-            <a:picLocks noChangeAspect="1"/>
-          </p:cNvPicPr>
-          <p:nvPr/>
-        </p:nvPicPr>
-        <p:blipFill>
-          <a:blip r:embed="rId2"/>
-          <a:stretch>
-            <a:fillRect/>
-          </a:stretch>
-        </p:blipFill>
-        <p:spPr>
-          <a:xfrm>
-            <a:off x="7851169" y="0"/>
-            <a:ext cx="4340831" cy="6858000"/>
-          </a:xfrm>
-          <a:prstGeom prst="rect">
-            <a:avLst/>
-          </a:prstGeom>
-        </p:spPr>
-      </p:pic>
-    </p:spTree>
-    <p:extLst>
-      <p:ext uri="{BB962C8B-B14F-4D97-AF65-F5344CB8AC3E}">
-        <p14:creationId xmlns:p14="http://schemas.microsoft.com/office/powerpoint/2010/main" val="2338619080"/>
-      </p:ext>
-    </p:extLst>
-  </p:cSld>
-  <p:clrMapOvr>
-    <a:masterClrMapping/>
-  </p:clrMapOvr>
-</p:sld>
-</file>
-
-<file path=ppt/slides/slide4.xml><?xml version="1.0" encoding="utf-8"?>
-<p:sld xmlns:a="http://schemas.openxmlformats.org/drawingml/2006/main" xmlns:r="http://schemas.openxmlformats.org/officeDocument/2006/relationships" xmlns:p="http://schemas.openxmlformats.org/presentationml/2006/main">
-  <p:cSld>
-    <p:spTree>
-      <p:nvGrpSpPr>
-        <p:cNvPr id="1" name=""/>
-        <p:cNvGrpSpPr/>
-        <p:nvPr/>
-      </p:nvGrpSpPr>
-      <p:grpSpPr>
-        <a:xfrm>
-          <a:off x="0" y="0"/>
-          <a:ext cx="0" cy="0"/>
-          <a:chOff x="0" y="0"/>
-          <a:chExt cx="0" cy="0"/>
-        </a:xfrm>
-      </p:grpSpPr>
-      <p:sp>
-        <p:nvSpPr>
-          <p:cNvPr id="2" name="标题 1">
-            <a:extLst>
-              <a:ext uri="{FF2B5EF4-FFF2-40B4-BE49-F238E27FC236}">
                 <a16:creationId xmlns:a16="http://schemas.microsoft.com/office/drawing/2014/main" id="{EE36D45D-D312-0D2D-D9C6-ED590934C9FC}"/>
               </a:ext>
             </a:extLst>
@@ -6251,215 +3831,7 @@
 </p:sld>
 </file>
 
-<file path=ppt/slides/slide5.xml><?xml version="1.0" encoding="utf-8"?>
-<p:sld xmlns:a="http://schemas.openxmlformats.org/drawingml/2006/main" xmlns:r="http://schemas.openxmlformats.org/officeDocument/2006/relationships" xmlns:p="http://schemas.openxmlformats.org/presentationml/2006/main">
-  <p:cSld>
-    <p:spTree>
-      <p:nvGrpSpPr>
-        <p:cNvPr id="1" name=""/>
-        <p:cNvGrpSpPr/>
-        <p:nvPr/>
-      </p:nvGrpSpPr>
-      <p:grpSpPr>
-        <a:xfrm>
-          <a:off x="0" y="0"/>
-          <a:ext cx="0" cy="0"/>
-          <a:chOff x="0" y="0"/>
-          <a:chExt cx="0" cy="0"/>
-        </a:xfrm>
-      </p:grpSpPr>
-      <p:sp>
-        <p:nvSpPr>
-          <p:cNvPr id="2" name="标题 1">
-            <a:extLst>
-              <a:ext uri="{FF2B5EF4-FFF2-40B4-BE49-F238E27FC236}">
-                <a16:creationId xmlns:a16="http://schemas.microsoft.com/office/drawing/2014/main" id="{EE36D45D-D312-0D2D-D9C6-ED590934C9FC}"/>
-              </a:ext>
-            </a:extLst>
-          </p:cNvPr>
-          <p:cNvSpPr>
-            <a:spLocks noGrp="1"/>
-          </p:cNvSpPr>
-          <p:nvPr>
-            <p:ph type="title"/>
-          </p:nvPr>
-        </p:nvSpPr>
-        <p:spPr/>
-        <p:txBody>
-          <a:bodyPr/>
-          <a:lstStyle/>
-          <a:p>
-            <a:r>
-              <a:rPr lang="en-US" altLang="zh-CN" dirty="0"/>
-              <a:t>2019</a:t>
-            </a:r>
-            <a:r>
-              <a:rPr lang="zh-CN" altLang="en-US" dirty="0"/>
-              <a:t>年度歌单 </a:t>
-            </a:r>
-            <a:r>
-              <a:rPr lang="en-US" altLang="zh-CN" dirty="0"/>
-              <a:t>6/10</a:t>
-            </a:r>
-            <a:r>
-              <a:rPr lang="zh-CN" altLang="en-US" dirty="0"/>
-              <a:t> </a:t>
-            </a:r>
-          </a:p>
-        </p:txBody>
-      </p:sp>
-      <p:sp>
-        <p:nvSpPr>
-          <p:cNvPr id="3" name="内容占位符 2">
-            <a:extLst>
-              <a:ext uri="{FF2B5EF4-FFF2-40B4-BE49-F238E27FC236}">
-                <a16:creationId xmlns:a16="http://schemas.microsoft.com/office/drawing/2014/main" id="{EA7F1CDA-A617-5B1B-65D7-8A53F4A89570}"/>
-              </a:ext>
-            </a:extLst>
-          </p:cNvPr>
-          <p:cNvSpPr>
-            <a:spLocks noGrp="1"/>
-          </p:cNvSpPr>
-          <p:nvPr>
-            <p:ph idx="1"/>
-          </p:nvPr>
-        </p:nvSpPr>
-        <p:spPr>
-          <a:xfrm>
-            <a:off x="838200" y="1825625"/>
-            <a:ext cx="6944139" cy="4351338"/>
-          </a:xfrm>
-        </p:spPr>
-        <p:txBody>
-          <a:bodyPr/>
-          <a:lstStyle/>
-          <a:p>
-            <a:pPr marL="0" indent="0">
-              <a:buNone/>
-            </a:pPr>
-            <a:r>
-              <a:rPr lang="zh-CN" altLang="en-US" dirty="0"/>
-              <a:t>向多元化发展的一年</a:t>
-            </a:r>
-            <a:r>
-              <a:rPr lang="en-US" altLang="zh-CN" dirty="0"/>
-              <a:t>. </a:t>
-            </a:r>
-            <a:r>
-              <a:rPr lang="zh-CN" altLang="en-US" dirty="0"/>
-              <a:t>纯音方面以</a:t>
-            </a:r>
-            <a:r>
-              <a:rPr lang="en-US" altLang="zh-CN" dirty="0"/>
-              <a:t>Tommy</a:t>
-            </a:r>
-            <a:r>
-              <a:rPr lang="zh-CN" altLang="en-US" dirty="0"/>
-              <a:t>大师的指弹为典型</a:t>
-            </a:r>
-            <a:r>
-              <a:rPr lang="en-US" altLang="zh-CN" dirty="0"/>
-              <a:t>; </a:t>
-            </a:r>
-            <a:r>
-              <a:rPr lang="zh-CN" altLang="en-US" dirty="0"/>
-              <a:t>电子方面了解轻电子</a:t>
-            </a:r>
-            <a:r>
-              <a:rPr lang="en-US" altLang="zh-CN" dirty="0"/>
-              <a:t>, </a:t>
-            </a:r>
-            <a:r>
-              <a:rPr lang="zh-CN" altLang="en-US" dirty="0"/>
-              <a:t>如</a:t>
-            </a:r>
-            <a:r>
-              <a:rPr lang="en-US" altLang="zh-CN" dirty="0"/>
-              <a:t>Trippy Love, Nothing On Us, </a:t>
-            </a:r>
-            <a:r>
-              <a:rPr lang="zh-CN" altLang="en-US" dirty="0"/>
-              <a:t>硬核的</a:t>
-            </a:r>
-            <a:r>
-              <a:rPr lang="en-US" altLang="zh-CN" dirty="0" err="1"/>
-              <a:t>Bouce</a:t>
-            </a:r>
-            <a:r>
-              <a:rPr lang="zh-CN" altLang="en-US" dirty="0"/>
-              <a:t>也在继续</a:t>
-            </a:r>
-            <a:r>
-              <a:rPr lang="en-US" altLang="zh-CN" dirty="0"/>
-              <a:t>, U Make Me</a:t>
-            </a:r>
-            <a:r>
-              <a:rPr lang="zh-CN" altLang="en-US" dirty="0"/>
-              <a:t>当之无愧成为金曲</a:t>
-            </a:r>
-            <a:r>
-              <a:rPr lang="en-US" altLang="zh-CN" dirty="0"/>
-              <a:t>; </a:t>
-            </a:r>
-            <a:r>
-              <a:rPr lang="zh-CN" altLang="en-US" dirty="0"/>
-              <a:t>流行方面抓回</a:t>
-            </a:r>
-            <a:r>
-              <a:rPr lang="en-US" altLang="zh-CN" dirty="0"/>
-              <a:t>Charlie Puth; Just Dropped In </a:t>
-            </a:r>
-            <a:r>
-              <a:rPr lang="zh-CN" altLang="en-US" dirty="0"/>
-              <a:t>有点爵士的意思</a:t>
-            </a:r>
-          </a:p>
-        </p:txBody>
-      </p:sp>
-      <p:pic>
-        <p:nvPicPr>
-          <p:cNvPr id="4" name="图片 3">
-            <a:extLst>
-              <a:ext uri="{FF2B5EF4-FFF2-40B4-BE49-F238E27FC236}">
-                <a16:creationId xmlns:a16="http://schemas.microsoft.com/office/drawing/2014/main" id="{C468FE5B-B9F8-F7FA-F3D4-546E7F30F008}"/>
-              </a:ext>
-            </a:extLst>
-          </p:cNvPr>
-          <p:cNvPicPr>
-            <a:picLocks noChangeAspect="1"/>
-          </p:cNvPicPr>
-          <p:nvPr/>
-        </p:nvPicPr>
-        <p:blipFill>
-          <a:blip r:embed="rId2"/>
-          <a:stretch>
-            <a:fillRect/>
-          </a:stretch>
-        </p:blipFill>
-        <p:spPr>
-          <a:xfrm>
-            <a:off x="7962216" y="0"/>
-            <a:ext cx="4229784" cy="6858000"/>
-          </a:xfrm>
-          <a:prstGeom prst="rect">
-            <a:avLst/>
-          </a:prstGeom>
-        </p:spPr>
-      </p:pic>
-    </p:spTree>
-    <p:extLst>
-      <p:ext uri="{BB962C8B-B14F-4D97-AF65-F5344CB8AC3E}">
-        <p14:creationId xmlns:p14="http://schemas.microsoft.com/office/powerpoint/2010/main" val="2942174803"/>
-      </p:ext>
-    </p:extLst>
-  </p:cSld>
-  <p:clrMapOvr>
-    <a:masterClrMapping/>
-  </p:clrMapOvr>
-</p:sld>
-</file>
-
-<file path=ppt/slides/slide6.xml><?xml version="1.0" encoding="utf-8"?>
+<file path=ppt/slides/slide4.xml><?xml version="1.0" encoding="utf-8"?>
 <p:sld xmlns:a="http://schemas.openxmlformats.org/drawingml/2006/main" xmlns:r="http://schemas.openxmlformats.org/officeDocument/2006/relationships" xmlns:p="http://schemas.openxmlformats.org/presentationml/2006/main">
   <p:cSld>
     <p:spTree>
@@ -6702,269 +4074,7 @@
 </p:sld>
 </file>
 
-<file path=ppt/slides/slide7.xml><?xml version="1.0" encoding="utf-8"?>
-<p:sld xmlns:a="http://schemas.openxmlformats.org/drawingml/2006/main" xmlns:r="http://schemas.openxmlformats.org/officeDocument/2006/relationships" xmlns:p="http://schemas.openxmlformats.org/presentationml/2006/main">
-  <p:cSld>
-    <p:spTree>
-      <p:nvGrpSpPr>
-        <p:cNvPr id="1" name=""/>
-        <p:cNvGrpSpPr/>
-        <p:nvPr/>
-      </p:nvGrpSpPr>
-      <p:grpSpPr>
-        <a:xfrm>
-          <a:off x="0" y="0"/>
-          <a:ext cx="0" cy="0"/>
-          <a:chOff x="0" y="0"/>
-          <a:chExt cx="0" cy="0"/>
-        </a:xfrm>
-      </p:grpSpPr>
-      <p:sp>
-        <p:nvSpPr>
-          <p:cNvPr id="2" name="标题 1">
-            <a:extLst>
-              <a:ext uri="{FF2B5EF4-FFF2-40B4-BE49-F238E27FC236}">
-                <a16:creationId xmlns:a16="http://schemas.microsoft.com/office/drawing/2014/main" id="{C5A98957-A864-D375-7AF5-7E88680736D2}"/>
-              </a:ext>
-            </a:extLst>
-          </p:cNvPr>
-          <p:cNvSpPr>
-            <a:spLocks noGrp="1"/>
-          </p:cNvSpPr>
-          <p:nvPr>
-            <p:ph type="title"/>
-          </p:nvPr>
-        </p:nvSpPr>
-        <p:spPr/>
-        <p:txBody>
-          <a:bodyPr/>
-          <a:lstStyle/>
-          <a:p>
-            <a:r>
-              <a:rPr lang="en-US" altLang="zh-CN" dirty="0"/>
-              <a:t>2020</a:t>
-            </a:r>
-            <a:r>
-              <a:rPr lang="zh-CN" altLang="en-US" dirty="0"/>
-              <a:t>年度歌单 </a:t>
-            </a:r>
-            <a:r>
-              <a:rPr lang="en-US" altLang="zh-CN" dirty="0"/>
-              <a:t>8/10</a:t>
-            </a:r>
-            <a:endParaRPr lang="zh-CN" altLang="en-US" dirty="0"/>
-          </a:p>
-        </p:txBody>
-      </p:sp>
-      <p:sp>
-        <p:nvSpPr>
-          <p:cNvPr id="3" name="内容占位符 2">
-            <a:extLst>
-              <a:ext uri="{FF2B5EF4-FFF2-40B4-BE49-F238E27FC236}">
-                <a16:creationId xmlns:a16="http://schemas.microsoft.com/office/drawing/2014/main" id="{5DD779B8-FD7B-64E5-998E-588856CC7A04}"/>
-              </a:ext>
-            </a:extLst>
-          </p:cNvPr>
-          <p:cNvSpPr>
-            <a:spLocks noGrp="1"/>
-          </p:cNvSpPr>
-          <p:nvPr>
-            <p:ph idx="1"/>
-          </p:nvPr>
-        </p:nvSpPr>
-        <p:spPr>
-          <a:xfrm>
-            <a:off x="838200" y="1825625"/>
-            <a:ext cx="6954078" cy="4351338"/>
-          </a:xfrm>
-        </p:spPr>
-        <p:txBody>
-          <a:bodyPr/>
-          <a:lstStyle/>
-          <a:p>
-            <a:pPr marL="0" indent="0">
-              <a:buNone/>
-            </a:pPr>
-            <a:r>
-              <a:rPr lang="zh-CN" altLang="en-US" dirty="0"/>
-              <a:t>二次元氛围浓起来了</a:t>
-            </a:r>
-            <a:r>
-              <a:rPr lang="en-US" altLang="zh-CN" dirty="0"/>
-              <a:t>, </a:t>
-            </a:r>
-            <a:r>
-              <a:rPr lang="zh-CN" altLang="en-US" dirty="0"/>
-              <a:t>开始对管乐产生兴趣</a:t>
-            </a:r>
-            <a:r>
-              <a:rPr lang="en-US" altLang="zh-CN" dirty="0"/>
-              <a:t>. </a:t>
-            </a:r>
-            <a:r>
-              <a:rPr lang="zh-CN" altLang="en-US" dirty="0"/>
-              <a:t>电子方面识别</a:t>
-            </a:r>
-            <a:r>
-              <a:rPr lang="en-US" altLang="zh-CN" dirty="0"/>
-              <a:t>7ubo</a:t>
-            </a:r>
-            <a:r>
-              <a:rPr lang="zh-CN" altLang="en-US" dirty="0"/>
-              <a:t>最佳曲</a:t>
-            </a:r>
-            <a:r>
-              <a:rPr lang="en-US" altLang="zh-CN" dirty="0"/>
-              <a:t>Cool, Bounce</a:t>
-            </a:r>
-            <a:r>
-              <a:rPr lang="zh-CN" altLang="en-US" dirty="0"/>
-              <a:t>听了</a:t>
-            </a:r>
-            <a:r>
-              <a:rPr lang="en-US" altLang="zh-CN" dirty="0"/>
-              <a:t>More Than Once, Miss, U Make Me, </a:t>
-            </a:r>
-            <a:r>
-              <a:rPr lang="zh-CN" altLang="en-US" dirty="0"/>
-              <a:t>且向更多风格涉猎</a:t>
-            </a:r>
-            <a:r>
-              <a:rPr lang="en-US" altLang="zh-CN" dirty="0"/>
-              <a:t>, </a:t>
-            </a:r>
-            <a:r>
-              <a:rPr lang="zh-CN" altLang="en-US" dirty="0"/>
-              <a:t>如‘</a:t>
-            </a:r>
-            <a:r>
-              <a:rPr lang="en-US" altLang="zh-CN" dirty="0"/>
-              <a:t>Electro Prog</a:t>
-            </a:r>
-            <a:r>
-              <a:rPr lang="zh-CN" altLang="en-US" dirty="0"/>
-              <a:t>’</a:t>
-            </a:r>
-            <a:r>
-              <a:rPr lang="en-US" altLang="zh-CN" dirty="0"/>
-              <a:t> Cool</a:t>
-            </a:r>
-            <a:r>
-              <a:rPr lang="zh-CN" altLang="en-US" dirty="0"/>
-              <a:t>、</a:t>
-            </a:r>
-            <a:r>
-              <a:rPr lang="en-US" altLang="zh-CN" dirty="0"/>
-              <a:t>Return To The Wild,</a:t>
-            </a:r>
-            <a:r>
-              <a:rPr lang="zh-CN" altLang="en-US" dirty="0"/>
-              <a:t> ‘</a:t>
-            </a:r>
-            <a:r>
-              <a:rPr lang="en-US" altLang="zh-CN" dirty="0"/>
-              <a:t>Future House</a:t>
-            </a:r>
-            <a:r>
-              <a:rPr lang="zh-CN" altLang="en-US" dirty="0"/>
-              <a:t>’ </a:t>
-            </a:r>
-            <a:r>
-              <a:rPr lang="en-US" altLang="zh-CN" dirty="0"/>
-              <a:t>Meant To Be (Remix), </a:t>
-            </a:r>
-            <a:r>
-              <a:rPr lang="zh-CN" altLang="en-US" dirty="0"/>
-              <a:t>‘</a:t>
-            </a:r>
-            <a:r>
-              <a:rPr lang="en-US" altLang="zh-CN" dirty="0" err="1"/>
-              <a:t>Complextro</a:t>
-            </a:r>
-            <a:r>
-              <a:rPr lang="zh-CN" altLang="en-US" dirty="0"/>
-              <a:t>’ </a:t>
-            </a:r>
-            <a:r>
-              <a:rPr lang="en-US" altLang="zh-CN" dirty="0" err="1"/>
-              <a:t>Grescale</a:t>
-            </a:r>
-            <a:r>
-              <a:rPr lang="en-US" altLang="zh-CN" dirty="0"/>
-              <a:t>. </a:t>
-            </a:r>
-            <a:r>
-              <a:rPr lang="zh-CN" altLang="en-US" dirty="0"/>
-              <a:t>生活方面开始学习</a:t>
-            </a:r>
-            <a:r>
-              <a:rPr lang="en-US" altLang="zh-CN" dirty="0"/>
-              <a:t>FL, </a:t>
-            </a:r>
-            <a:r>
-              <a:rPr lang="zh-CN" altLang="en-US" dirty="0"/>
-              <a:t>制作</a:t>
-            </a:r>
-            <a:r>
-              <a:rPr lang="en-US" altLang="zh-CN" dirty="0"/>
-              <a:t>Whale Fall, </a:t>
-            </a:r>
-            <a:r>
-              <a:rPr lang="zh-CN" altLang="en-US" dirty="0"/>
-              <a:t>回顾影响我最大的动漫</a:t>
-            </a:r>
-            <a:r>
-              <a:rPr lang="en-US" altLang="zh-CN" dirty="0"/>
-              <a:t>.</a:t>
-            </a:r>
-            <a:endParaRPr lang="zh-CN" altLang="en-US" dirty="0"/>
-          </a:p>
-        </p:txBody>
-      </p:sp>
-      <p:pic>
-        <p:nvPicPr>
-          <p:cNvPr id="4" name="图片 3">
-            <a:extLst>
-              <a:ext uri="{FF2B5EF4-FFF2-40B4-BE49-F238E27FC236}">
-                <a16:creationId xmlns:a16="http://schemas.microsoft.com/office/drawing/2014/main" id="{1112CF87-75DE-E933-40DA-B4958C9D1839}"/>
-              </a:ext>
-            </a:extLst>
-          </p:cNvPr>
-          <p:cNvPicPr>
-            <a:picLocks noChangeAspect="1"/>
-          </p:cNvPicPr>
-          <p:nvPr/>
-        </p:nvPicPr>
-        <p:blipFill>
-          <a:blip r:embed="rId2"/>
-          <a:stretch>
-            <a:fillRect/>
-          </a:stretch>
-        </p:blipFill>
-        <p:spPr>
-          <a:xfrm>
-            <a:off x="8032366" y="0"/>
-            <a:ext cx="4159634" cy="6858000"/>
-          </a:xfrm>
-          <a:prstGeom prst="rect">
-            <a:avLst/>
-          </a:prstGeom>
-        </p:spPr>
-      </p:pic>
-    </p:spTree>
-    <p:extLst>
-      <p:ext uri="{BB962C8B-B14F-4D97-AF65-F5344CB8AC3E}">
-        <p14:creationId xmlns:p14="http://schemas.microsoft.com/office/powerpoint/2010/main" val="3480783848"/>
-      </p:ext>
-    </p:extLst>
-  </p:cSld>
-  <p:clrMapOvr>
-    <a:masterClrMapping/>
-  </p:clrMapOvr>
-</p:sld>
-</file>
-
-<file path=ppt/slides/slide8.xml><?xml version="1.0" encoding="utf-8"?>
+<file path=ppt/slides/slide5.xml><?xml version="1.0" encoding="utf-8"?>
 <p:sld xmlns:a="http://schemas.openxmlformats.org/drawingml/2006/main" xmlns:r="http://schemas.openxmlformats.org/officeDocument/2006/relationships" xmlns:p="http://schemas.openxmlformats.org/presentationml/2006/main">
   <p:cSld>
     <p:spTree>
@@ -7211,7 +4321,7 @@
 </p:sld>
 </file>
 
-<file path=ppt/slides/slide9.xml><?xml version="1.0" encoding="utf-8"?>
+<file path=ppt/slides/slide6.xml><?xml version="1.0" encoding="utf-8"?>
 <p:sld xmlns:a="http://schemas.openxmlformats.org/drawingml/2006/main" xmlns:r="http://schemas.openxmlformats.org/officeDocument/2006/relationships" xmlns:p="http://schemas.openxmlformats.org/presentationml/2006/main">
   <p:cSld>
     <p:spTree>
@@ -7233,7 +4343,7 @@
           <p:cNvPr id="2" name="标题 1">
             <a:extLst>
               <a:ext uri="{FF2B5EF4-FFF2-40B4-BE49-F238E27FC236}">
-                <a16:creationId xmlns:a16="http://schemas.microsoft.com/office/drawing/2014/main" id="{6A239891-882A-E610-B09A-F649B38515BA}"/>
+                <a16:creationId xmlns:a16="http://schemas.microsoft.com/office/drawing/2014/main" id="{8FBF488D-F1F5-93D7-F83F-757B79A33123}"/>
               </a:ext>
             </a:extLst>
           </p:cNvPr>
@@ -7251,7 +4361,7 @@
           <a:p>
             <a:r>
               <a:rPr lang="en-US" altLang="zh-CN" dirty="0"/>
-              <a:t>2021</a:t>
+              <a:t>2022</a:t>
             </a:r>
             <a:r>
               <a:rPr lang="zh-CN" altLang="en-US" dirty="0"/>
@@ -7261,214 +4371,137 @@
               <a:rPr lang="en-US" altLang="zh-CN" dirty="0"/>
               <a:t>8/10</a:t>
             </a:r>
+            <a:endParaRPr lang="zh-CN" altLang="en-US" dirty="0"/>
+          </a:p>
+        </p:txBody>
+      </p:sp>
+      <p:sp>
+        <p:nvSpPr>
+          <p:cNvPr id="3" name="内容占位符 2">
+            <a:extLst>
+              <a:ext uri="{FF2B5EF4-FFF2-40B4-BE49-F238E27FC236}">
+                <a16:creationId xmlns:a16="http://schemas.microsoft.com/office/drawing/2014/main" id="{FFFA41F0-5E19-75FB-842B-B7355838F064}"/>
+              </a:ext>
+            </a:extLst>
+          </p:cNvPr>
+          <p:cNvSpPr>
+            <a:spLocks noGrp="1"/>
+          </p:cNvSpPr>
+          <p:nvPr>
+            <p:ph idx="1"/>
+          </p:nvPr>
+        </p:nvSpPr>
+        <p:spPr/>
+        <p:txBody>
+          <a:bodyPr/>
+          <a:lstStyle/>
+          <a:p>
+            <a:pPr marL="0" indent="0">
+              <a:buNone/>
+            </a:pPr>
+            <a:r>
+              <a:rPr lang="en-US" altLang="zh-CN" dirty="0">
+                <a:highlight>
+                  <a:srgbClr val="00FFFF"/>
+                </a:highlight>
+              </a:rPr>
+              <a:t>02-Op. 40,  No. 6</a:t>
+            </a:r>
+          </a:p>
+          <a:p>
+            <a:pPr marL="0" indent="0">
+              <a:buNone/>
+            </a:pPr>
+            <a:r>
+              <a:rPr lang="en-US" altLang="zh-CN" dirty="0"/>
+              <a:t>03-Reality</a:t>
+            </a:r>
+          </a:p>
+          <a:p>
+            <a:pPr marL="0" indent="0">
+              <a:buNone/>
+            </a:pPr>
+            <a:r>
+              <a:rPr lang="en-US" altLang="zh-CN" dirty="0">
+                <a:highlight>
+                  <a:srgbClr val="FFFF00"/>
+                </a:highlight>
+              </a:rPr>
+              <a:t>04-Your Move</a:t>
+            </a:r>
+          </a:p>
+          <a:p>
+            <a:pPr marL="0" indent="0">
+              <a:buNone/>
+            </a:pPr>
+            <a:r>
+              <a:rPr lang="en-US" altLang="zh-CN" dirty="0">
+                <a:highlight>
+                  <a:srgbClr val="00FFFF"/>
+                </a:highlight>
+              </a:rPr>
+              <a:t>05-Op. 40,  No. 1</a:t>
+            </a:r>
+          </a:p>
+          <a:p>
+            <a:pPr marL="0" indent="0">
+              <a:buNone/>
+            </a:pPr>
+            <a:r>
+              <a:rPr lang="en-US" altLang="zh-CN" dirty="0">
+                <a:highlight>
+                  <a:srgbClr val="00FFFF"/>
+                </a:highlight>
+              </a:rPr>
+              <a:t>06-Op. 40,  No. 3</a:t>
+            </a:r>
+          </a:p>
+          <a:p>
+            <a:pPr marL="0" indent="0">
+              <a:buNone/>
+            </a:pPr>
+            <a:r>
+              <a:rPr lang="en-US" altLang="zh-CN" dirty="0"/>
+              <a:t>07-</a:t>
+            </a:r>
             <a:r>
               <a:rPr lang="zh-CN" altLang="en-US" dirty="0"/>
-              <a:t> </a:t>
-            </a:r>
-          </a:p>
-        </p:txBody>
-      </p:sp>
-      <p:sp>
-        <p:nvSpPr>
-          <p:cNvPr id="3" name="内容占位符 2">
-            <a:extLst>
-              <a:ext uri="{FF2B5EF4-FFF2-40B4-BE49-F238E27FC236}">
-                <a16:creationId xmlns:a16="http://schemas.microsoft.com/office/drawing/2014/main" id="{5CB1D401-60DD-867B-386F-AA62A2F41F02}"/>
-              </a:ext>
-            </a:extLst>
-          </p:cNvPr>
-          <p:cNvSpPr>
-            <a:spLocks noGrp="1"/>
-          </p:cNvSpPr>
-          <p:nvPr>
-            <p:ph idx="1"/>
-          </p:nvPr>
-        </p:nvSpPr>
-        <p:spPr>
-          <a:xfrm>
-            <a:off x="838200" y="1825625"/>
-            <a:ext cx="6993835" cy="4351338"/>
-          </a:xfrm>
-        </p:spPr>
-        <p:txBody>
-          <a:bodyPr/>
-          <a:lstStyle/>
-          <a:p>
-            <a:pPr marL="0" indent="0">
-              <a:buNone/>
-            </a:pPr>
+              <a:t>爱の诗</a:t>
+            </a:r>
+            <a:endParaRPr lang="en-US" altLang="zh-CN" dirty="0"/>
+          </a:p>
+          <a:p>
+            <a:pPr marL="0" indent="0">
+              <a:buNone/>
+            </a:pPr>
+            <a:r>
+              <a:rPr lang="en-US" altLang="zh-CN" dirty="0"/>
+              <a:t>08-A Short Story</a:t>
+            </a:r>
+          </a:p>
+          <a:p>
+            <a:pPr marL="0" indent="0">
+              <a:buNone/>
+            </a:pPr>
+            <a:r>
+              <a:rPr lang="en-US" altLang="zh-CN" dirty="0"/>
+              <a:t>10-</a:t>
+            </a:r>
             <a:r>
               <a:rPr lang="zh-CN" altLang="en-US" dirty="0"/>
-              <a:t>向爵士与古典发展的一年</a:t>
-            </a:r>
-            <a:r>
-              <a:rPr lang="en-US" altLang="zh-CN" dirty="0"/>
-              <a:t>, </a:t>
-            </a:r>
-            <a:r>
-              <a:rPr lang="zh-CN" altLang="en-US" dirty="0"/>
-              <a:t>欣赏并学习</a:t>
-            </a:r>
-            <a:r>
-              <a:rPr lang="en-US" altLang="zh-CN" dirty="0"/>
-              <a:t>Op.</a:t>
-            </a:r>
-            <a:r>
-              <a:rPr lang="zh-CN" altLang="en-US" dirty="0"/>
-              <a:t> </a:t>
-            </a:r>
-            <a:r>
-              <a:rPr lang="en-US" altLang="zh-CN" dirty="0"/>
-              <a:t>53 No.</a:t>
-            </a:r>
-            <a:r>
-              <a:rPr lang="zh-CN" altLang="en-US" dirty="0"/>
-              <a:t> </a:t>
-            </a:r>
-            <a:r>
-              <a:rPr lang="en-US" altLang="zh-CN" dirty="0"/>
-              <a:t>23, </a:t>
-            </a:r>
-            <a:r>
-              <a:rPr lang="zh-CN" altLang="en-US" dirty="0"/>
-              <a:t>居然同年看了</a:t>
-            </a:r>
-            <a:r>
-              <a:rPr lang="en-US" altLang="zh-CN" dirty="0"/>
-              <a:t>Kapustin</a:t>
-            </a:r>
-            <a:r>
-              <a:rPr lang="zh-CN" altLang="en-US" dirty="0"/>
-              <a:t>音乐会</a:t>
-            </a:r>
-            <a:r>
-              <a:rPr lang="en-US" altLang="zh-CN" dirty="0"/>
-              <a:t>, </a:t>
-            </a:r>
-            <a:r>
-              <a:rPr lang="zh-CN" altLang="en-US" dirty="0"/>
-              <a:t>对我的品味影响深远</a:t>
-            </a:r>
-            <a:r>
-              <a:rPr lang="en-US" altLang="zh-CN" dirty="0"/>
-              <a:t>. </a:t>
-            </a:r>
-            <a:r>
-              <a:rPr lang="zh-CN" altLang="en-US" dirty="0"/>
-              <a:t>电子方面</a:t>
-            </a:r>
-            <a:r>
-              <a:rPr lang="en-US" altLang="zh-CN" dirty="0"/>
-              <a:t>, Future Bounce </a:t>
-            </a:r>
-            <a:r>
-              <a:rPr lang="zh-CN" altLang="en-US" dirty="0"/>
-              <a:t>摸到天花板 </a:t>
-            </a:r>
-            <a:r>
-              <a:rPr lang="en-US" altLang="zh-CN" dirty="0"/>
-              <a:t>Mad World (Remix), </a:t>
-            </a:r>
-            <a:r>
-              <a:rPr lang="zh-CN" altLang="en-US" dirty="0"/>
-              <a:t>从</a:t>
-            </a:r>
-            <a:r>
-              <a:rPr lang="en-US" altLang="zh-CN" dirty="0"/>
-              <a:t>MHA</a:t>
-            </a:r>
-            <a:r>
-              <a:rPr lang="zh-CN" altLang="en-US" dirty="0"/>
-              <a:t>视频里学</a:t>
-            </a:r>
-            <a:r>
-              <a:rPr lang="en-US" altLang="zh-CN" dirty="0"/>
-              <a:t>Future House, </a:t>
-            </a:r>
-            <a:r>
-              <a:rPr lang="zh-CN" altLang="en-US" dirty="0"/>
-              <a:t>多首入选</a:t>
-            </a:r>
-            <a:r>
-              <a:rPr lang="en-US" altLang="zh-CN" dirty="0"/>
-              <a:t>, </a:t>
-            </a:r>
-            <a:r>
-              <a:rPr lang="zh-CN" altLang="en-US" dirty="0"/>
-              <a:t>其中有</a:t>
-            </a:r>
-            <a:r>
-              <a:rPr lang="en-US" altLang="zh-CN" dirty="0" err="1"/>
-              <a:t>Retrovision</a:t>
-            </a:r>
-            <a:r>
-              <a:rPr lang="en-US" altLang="zh-CN" dirty="0"/>
-              <a:t> </a:t>
-            </a:r>
-            <a:r>
-              <a:rPr lang="zh-CN" altLang="en-US" dirty="0"/>
-              <a:t>顶级</a:t>
-            </a:r>
-            <a:r>
-              <a:rPr lang="en-US" altLang="zh-CN" dirty="0"/>
-              <a:t>IP Waves, D&amp;B</a:t>
-            </a:r>
-            <a:r>
-              <a:rPr lang="zh-CN" altLang="en-US" dirty="0"/>
-              <a:t>也有听</a:t>
-            </a:r>
-            <a:r>
-              <a:rPr lang="en-US" altLang="zh-CN" dirty="0"/>
-              <a:t>Feint </a:t>
-            </a:r>
-            <a:r>
-              <a:rPr lang="zh-CN" altLang="en-US" dirty="0"/>
-              <a:t>的</a:t>
-            </a:r>
-            <a:r>
-              <a:rPr lang="en-US" altLang="zh-CN" dirty="0"/>
-              <a:t>Weavers, Au5</a:t>
-            </a:r>
-            <a:r>
-              <a:rPr lang="zh-CN" altLang="en-US" dirty="0"/>
-              <a:t>的</a:t>
-            </a:r>
-            <a:r>
-              <a:rPr lang="en-US" altLang="zh-CN" dirty="0"/>
-              <a:t>Future Garage</a:t>
-            </a:r>
-            <a:r>
-              <a:rPr lang="zh-CN" altLang="en-US" dirty="0"/>
-              <a:t>搭配管弦乐过于惊艳</a:t>
-            </a:r>
-            <a:r>
-              <a:rPr lang="en-US" altLang="zh-CN" dirty="0"/>
-              <a:t>; </a:t>
-            </a:r>
-            <a:r>
-              <a:rPr lang="zh-CN" altLang="en-US" dirty="0"/>
-              <a:t>流行方面向融合发展</a:t>
-            </a:r>
-            <a:r>
-              <a:rPr lang="en-US" altLang="zh-CN" dirty="0"/>
-              <a:t>, </a:t>
-            </a:r>
-            <a:r>
-              <a:rPr lang="zh-CN" altLang="en-US" dirty="0"/>
-              <a:t>听</a:t>
-            </a:r>
-            <a:r>
-              <a:rPr lang="en-US" altLang="zh-CN" dirty="0"/>
-              <a:t>Be Calm, The Fun.</a:t>
-            </a:r>
-            <a:r>
-              <a:rPr lang="zh-CN" altLang="en-US" dirty="0"/>
-              <a:t> 真的很厉害</a:t>
-            </a:r>
-            <a:r>
-              <a:rPr lang="en-US" altLang="zh-CN" dirty="0"/>
-              <a:t>.</a:t>
-            </a:r>
+              <a:t>罗生门</a:t>
+            </a:r>
+          </a:p>
+          <a:p>
+            <a:pPr marL="0" indent="0">
+              <a:buNone/>
+            </a:pPr>
+            <a:endParaRPr lang="zh-CN" altLang="en-US" dirty="0"/>
+          </a:p>
+          <a:p>
+            <a:pPr marL="0" indent="0">
+              <a:buNone/>
+            </a:pPr>
             <a:endParaRPr lang="zh-CN" altLang="en-US" dirty="0"/>
           </a:p>
         </p:txBody>
@@ -7478,7 +4511,7 @@
           <p:cNvPr id="4" name="图片 3">
             <a:extLst>
               <a:ext uri="{FF2B5EF4-FFF2-40B4-BE49-F238E27FC236}">
-                <a16:creationId xmlns:a16="http://schemas.microsoft.com/office/drawing/2014/main" id="{8286DBD0-7277-A4F3-B2AE-31FC6E211921}"/>
+                <a16:creationId xmlns:a16="http://schemas.microsoft.com/office/drawing/2014/main" id="{8D63DF60-5C82-0983-1A85-708F920530EE}"/>
               </a:ext>
             </a:extLst>
           </p:cNvPr>
@@ -7495,8 +4528,37 @@
         </p:blipFill>
         <p:spPr>
           <a:xfrm>
-            <a:off x="7949339" y="0"/>
-            <a:ext cx="4242661" cy="6858000"/>
+            <a:off x="7378212" y="0"/>
+            <a:ext cx="4813788" cy="6858000"/>
+          </a:xfrm>
+          <a:prstGeom prst="rect">
+            <a:avLst/>
+          </a:prstGeom>
+        </p:spPr>
+      </p:pic>
+      <p:pic>
+        <p:nvPicPr>
+          <p:cNvPr id="5" name="图片 4">
+            <a:extLst>
+              <a:ext uri="{FF2B5EF4-FFF2-40B4-BE49-F238E27FC236}">
+                <a16:creationId xmlns:a16="http://schemas.microsoft.com/office/drawing/2014/main" id="{95F22B46-4596-B3F9-6071-07DB705D6F7E}"/>
+              </a:ext>
+            </a:extLst>
+          </p:cNvPr>
+          <p:cNvPicPr>
+            <a:picLocks noChangeAspect="1"/>
+          </p:cNvPicPr>
+          <p:nvPr/>
+        </p:nvPicPr>
+        <p:blipFill rotWithShape="1">
+          <a:blip r:embed="rId3"/>
+          <a:srcRect l="27617" t="-870" r="37927" b="34348"/>
+          <a:stretch/>
+        </p:blipFill>
+        <p:spPr>
+          <a:xfrm>
+            <a:off x="3568180" y="2432380"/>
+            <a:ext cx="1080053" cy="1251878"/>
           </a:xfrm>
           <a:prstGeom prst="rect">
             <a:avLst/>
@@ -7506,7 +4568,1028 @@
     </p:spTree>
     <p:extLst>
       <p:ext uri="{BB962C8B-B14F-4D97-AF65-F5344CB8AC3E}">
-        <p14:creationId xmlns:p14="http://schemas.microsoft.com/office/powerpoint/2010/main" val="4081385019"/>
+        <p14:creationId xmlns:p14="http://schemas.microsoft.com/office/powerpoint/2010/main" val="1709954340"/>
+      </p:ext>
+    </p:extLst>
+  </p:cSld>
+  <p:clrMapOvr>
+    <a:masterClrMapping/>
+  </p:clrMapOvr>
+</p:sld>
+</file>
+
+<file path=ppt/slides/slide7.xml><?xml version="1.0" encoding="utf-8"?>
+<p:sld xmlns:a="http://schemas.openxmlformats.org/drawingml/2006/main" xmlns:r="http://schemas.openxmlformats.org/officeDocument/2006/relationships" xmlns:p="http://schemas.openxmlformats.org/presentationml/2006/main">
+  <p:cSld>
+    <p:spTree>
+      <p:nvGrpSpPr>
+        <p:cNvPr id="1" name=""/>
+        <p:cNvGrpSpPr/>
+        <p:nvPr/>
+      </p:nvGrpSpPr>
+      <p:grpSpPr>
+        <a:xfrm>
+          <a:off x="0" y="0"/>
+          <a:ext cx="0" cy="0"/>
+          <a:chOff x="0" y="0"/>
+          <a:chExt cx="0" cy="0"/>
+        </a:xfrm>
+      </p:grpSpPr>
+      <p:sp>
+        <p:nvSpPr>
+          <p:cNvPr id="2" name="标题 1">
+            <a:extLst>
+              <a:ext uri="{FF2B5EF4-FFF2-40B4-BE49-F238E27FC236}">
+                <a16:creationId xmlns:a16="http://schemas.microsoft.com/office/drawing/2014/main" id="{418B3808-1535-0342-3C36-C611DB3CB551}"/>
+              </a:ext>
+            </a:extLst>
+          </p:cNvPr>
+          <p:cNvSpPr>
+            <a:spLocks noGrp="1"/>
+          </p:cNvSpPr>
+          <p:nvPr>
+            <p:ph type="title"/>
+          </p:nvPr>
+        </p:nvSpPr>
+        <p:spPr/>
+        <p:txBody>
+          <a:bodyPr/>
+          <a:lstStyle/>
+          <a:p>
+            <a:r>
+              <a:rPr lang="en-US" altLang="zh-CN" dirty="0"/>
+              <a:t>2023</a:t>
+            </a:r>
+            <a:r>
+              <a:rPr lang="zh-CN" altLang="en-US" dirty="0"/>
+              <a:t>年度歌单 </a:t>
+            </a:r>
+            <a:r>
+              <a:rPr lang="en-US" altLang="zh-CN" dirty="0"/>
+              <a:t>9/10</a:t>
+            </a:r>
+            <a:endParaRPr lang="zh-CN" altLang="en-US" dirty="0"/>
+          </a:p>
+        </p:txBody>
+      </p:sp>
+      <p:sp>
+        <p:nvSpPr>
+          <p:cNvPr id="3" name="内容占位符 2">
+            <a:extLst>
+              <a:ext uri="{FF2B5EF4-FFF2-40B4-BE49-F238E27FC236}">
+                <a16:creationId xmlns:a16="http://schemas.microsoft.com/office/drawing/2014/main" id="{31AF7579-1B1B-62A1-7807-E186B7408831}"/>
+              </a:ext>
+            </a:extLst>
+          </p:cNvPr>
+          <p:cNvSpPr>
+            <a:spLocks noGrp="1"/>
+          </p:cNvSpPr>
+          <p:nvPr>
+            <p:ph idx="1"/>
+          </p:nvPr>
+        </p:nvSpPr>
+        <p:spPr/>
+        <p:txBody>
+          <a:bodyPr>
+            <a:normAutofit lnSpcReduction="10000"/>
+          </a:bodyPr>
+          <a:lstStyle/>
+          <a:p>
+            <a:pPr marL="0" indent="0">
+              <a:buNone/>
+            </a:pPr>
+            <a:r>
+              <a:rPr lang="en-US" altLang="zh-CN" dirty="0">
+                <a:highlight>
+                  <a:srgbClr val="00FFFF"/>
+                </a:highlight>
+              </a:rPr>
+              <a:t>01-Op. 40,  No. 8</a:t>
+            </a:r>
+          </a:p>
+          <a:p>
+            <a:pPr marL="0" indent="0">
+              <a:buNone/>
+            </a:pPr>
+            <a:r>
+              <a:rPr lang="en-US" altLang="zh-CN" dirty="0">
+                <a:highlight>
+                  <a:srgbClr val="00FFFF"/>
+                </a:highlight>
+              </a:rPr>
+              <a:t>02-Op. 40,  No. 2</a:t>
+            </a:r>
+          </a:p>
+          <a:p>
+            <a:pPr marL="0" indent="0">
+              <a:buNone/>
+            </a:pPr>
+            <a:r>
+              <a:rPr lang="en-US" altLang="zh-CN" dirty="0">
+                <a:highlight>
+                  <a:srgbClr val="00FFFF"/>
+                </a:highlight>
+              </a:rPr>
+              <a:t>03-Op. 40,  No. 8</a:t>
+            </a:r>
+          </a:p>
+          <a:p>
+            <a:pPr marL="0" indent="0">
+              <a:buNone/>
+            </a:pPr>
+            <a:r>
+              <a:rPr lang="en-US" altLang="zh-CN" dirty="0"/>
+              <a:t>04-summit</a:t>
+            </a:r>
+          </a:p>
+          <a:p>
+            <a:pPr marL="0" indent="0">
+              <a:buNone/>
+            </a:pPr>
+            <a:r>
+              <a:rPr lang="en-US" altLang="zh-CN" dirty="0"/>
+              <a:t>06-Loretta</a:t>
+            </a:r>
+          </a:p>
+          <a:p>
+            <a:pPr marL="0" indent="0">
+              <a:buNone/>
+            </a:pPr>
+            <a:r>
+              <a:rPr lang="en-US" altLang="zh-CN" dirty="0"/>
+              <a:t>07-Wonderful Slippery Thing</a:t>
+            </a:r>
+          </a:p>
+          <a:p>
+            <a:pPr marL="0" indent="0">
+              <a:buNone/>
+            </a:pPr>
+            <a:r>
+              <a:rPr lang="en-US" altLang="zh-CN" dirty="0">
+                <a:highlight>
+                  <a:srgbClr val="00FFFF"/>
+                </a:highlight>
+              </a:rPr>
+              <a:t>08-Op. 40,  No. 3</a:t>
+            </a:r>
+          </a:p>
+          <a:p>
+            <a:pPr marL="0" indent="0">
+              <a:buNone/>
+            </a:pPr>
+            <a:r>
+              <a:rPr lang="en-US" altLang="zh-CN" dirty="0">
+                <a:highlight>
+                  <a:srgbClr val="FFFF00"/>
+                </a:highlight>
+              </a:rPr>
+              <a:t>09-Velours</a:t>
+            </a:r>
+          </a:p>
+          <a:p>
+            <a:pPr marL="0" indent="0">
+              <a:buNone/>
+            </a:pPr>
+            <a:r>
+              <a:rPr lang="en-US" altLang="zh-CN" dirty="0"/>
+              <a:t>10-Playing God</a:t>
+            </a:r>
+            <a:endParaRPr lang="zh-CN" altLang="en-US" dirty="0"/>
+          </a:p>
+          <a:p>
+            <a:pPr marL="0" indent="0">
+              <a:buNone/>
+            </a:pPr>
+            <a:endParaRPr lang="zh-CN" altLang="en-US" dirty="0"/>
+          </a:p>
+          <a:p>
+            <a:pPr marL="0" indent="0">
+              <a:buNone/>
+            </a:pPr>
+            <a:endParaRPr lang="zh-CN" altLang="en-US" dirty="0"/>
+          </a:p>
+          <a:p>
+            <a:pPr marL="0" indent="0">
+              <a:buNone/>
+            </a:pPr>
+            <a:endParaRPr lang="zh-CN" altLang="en-US" dirty="0"/>
+          </a:p>
+        </p:txBody>
+      </p:sp>
+      <p:pic>
+        <p:nvPicPr>
+          <p:cNvPr id="4" name="图片 3">
+            <a:extLst>
+              <a:ext uri="{FF2B5EF4-FFF2-40B4-BE49-F238E27FC236}">
+                <a16:creationId xmlns:a16="http://schemas.microsoft.com/office/drawing/2014/main" id="{77320971-CF53-0586-9FE2-7619183C687B}"/>
+              </a:ext>
+            </a:extLst>
+          </p:cNvPr>
+          <p:cNvPicPr>
+            <a:picLocks noChangeAspect="1"/>
+          </p:cNvPicPr>
+          <p:nvPr/>
+        </p:nvPicPr>
+        <p:blipFill>
+          <a:blip r:embed="rId2"/>
+          <a:stretch>
+            <a:fillRect/>
+          </a:stretch>
+        </p:blipFill>
+        <p:spPr>
+          <a:xfrm>
+            <a:off x="7935310" y="0"/>
+            <a:ext cx="4256690" cy="6858000"/>
+          </a:xfrm>
+          <a:prstGeom prst="rect">
+            <a:avLst/>
+          </a:prstGeom>
+        </p:spPr>
+      </p:pic>
+      <p:pic>
+        <p:nvPicPr>
+          <p:cNvPr id="5" name="图片 4">
+            <a:extLst>
+              <a:ext uri="{FF2B5EF4-FFF2-40B4-BE49-F238E27FC236}">
+                <a16:creationId xmlns:a16="http://schemas.microsoft.com/office/drawing/2014/main" id="{389E5322-80BD-8B75-3644-A19F5D50347F}"/>
+              </a:ext>
+            </a:extLst>
+          </p:cNvPr>
+          <p:cNvPicPr>
+            <a:picLocks noChangeAspect="1"/>
+          </p:cNvPicPr>
+          <p:nvPr/>
+        </p:nvPicPr>
+        <p:blipFill rotWithShape="1">
+          <a:blip r:embed="rId3"/>
+          <a:srcRect l="27617" t="-870" r="37927" b="34348"/>
+          <a:stretch/>
+        </p:blipFill>
+        <p:spPr>
+          <a:xfrm>
+            <a:off x="3617843" y="4639665"/>
+            <a:ext cx="1080053" cy="1251878"/>
+          </a:xfrm>
+          <a:prstGeom prst="rect">
+            <a:avLst/>
+          </a:prstGeom>
+        </p:spPr>
+      </p:pic>
+    </p:spTree>
+    <p:extLst>
+      <p:ext uri="{BB962C8B-B14F-4D97-AF65-F5344CB8AC3E}">
+        <p14:creationId xmlns:p14="http://schemas.microsoft.com/office/powerpoint/2010/main" val="2161395820"/>
+      </p:ext>
+    </p:extLst>
+  </p:cSld>
+  <p:clrMapOvr>
+    <a:masterClrMapping/>
+  </p:clrMapOvr>
+</p:sld>
+</file>
+
+<file path=ppt/slides/slide8.xml><?xml version="1.0" encoding="utf-8"?>
+<p:sld xmlns:a="http://schemas.openxmlformats.org/drawingml/2006/main" xmlns:r="http://schemas.openxmlformats.org/officeDocument/2006/relationships" xmlns:p="http://schemas.openxmlformats.org/presentationml/2006/main">
+  <p:cSld>
+    <p:spTree>
+      <p:nvGrpSpPr>
+        <p:cNvPr id="1" name=""/>
+        <p:cNvGrpSpPr/>
+        <p:nvPr/>
+      </p:nvGrpSpPr>
+      <p:grpSpPr>
+        <a:xfrm>
+          <a:off x="0" y="0"/>
+          <a:ext cx="0" cy="0"/>
+          <a:chOff x="0" y="0"/>
+          <a:chExt cx="0" cy="0"/>
+        </a:xfrm>
+      </p:grpSpPr>
+      <p:sp>
+        <p:nvSpPr>
+          <p:cNvPr id="2" name="标题 1">
+            <a:extLst>
+              <a:ext uri="{FF2B5EF4-FFF2-40B4-BE49-F238E27FC236}">
+                <a16:creationId xmlns:a16="http://schemas.microsoft.com/office/drawing/2014/main" id="{91ABC539-E50B-4BED-8076-BFB2F8413F20}"/>
+              </a:ext>
+            </a:extLst>
+          </p:cNvPr>
+          <p:cNvSpPr>
+            <a:spLocks noGrp="1"/>
+          </p:cNvSpPr>
+          <p:nvPr>
+            <p:ph type="title"/>
+          </p:nvPr>
+        </p:nvSpPr>
+        <p:spPr/>
+        <p:txBody>
+          <a:bodyPr/>
+          <a:lstStyle/>
+          <a:p>
+            <a:r>
+              <a:rPr lang="en-US" altLang="zh-CN" dirty="0"/>
+              <a:t>2024</a:t>
+            </a:r>
+            <a:r>
+              <a:rPr lang="zh-CN" altLang="en-US" dirty="0"/>
+              <a:t>年度歌单 </a:t>
+            </a:r>
+            <a:r>
+              <a:rPr lang="en-US" altLang="zh-CN" dirty="0"/>
+              <a:t>10/10</a:t>
+            </a:r>
+            <a:endParaRPr lang="zh-CN" altLang="en-US" dirty="0"/>
+          </a:p>
+        </p:txBody>
+      </p:sp>
+      <p:sp>
+        <p:nvSpPr>
+          <p:cNvPr id="3" name="内容占位符 2">
+            <a:extLst>
+              <a:ext uri="{FF2B5EF4-FFF2-40B4-BE49-F238E27FC236}">
+                <a16:creationId xmlns:a16="http://schemas.microsoft.com/office/drawing/2014/main" id="{45592CE2-370D-465C-921E-9859141890F6}"/>
+              </a:ext>
+            </a:extLst>
+          </p:cNvPr>
+          <p:cNvSpPr>
+            <a:spLocks noGrp="1"/>
+          </p:cNvSpPr>
+          <p:nvPr>
+            <p:ph idx="1"/>
+          </p:nvPr>
+        </p:nvSpPr>
+        <p:spPr/>
+        <p:txBody>
+          <a:bodyPr>
+            <a:normAutofit fontScale="92500" lnSpcReduction="20000"/>
+          </a:bodyPr>
+          <a:lstStyle/>
+          <a:p>
+            <a:pPr marL="0" indent="0">
+              <a:buNone/>
+            </a:pPr>
+            <a:r>
+              <a:rPr lang="en-US" altLang="zh-CN" dirty="0">
+                <a:highlight>
+                  <a:srgbClr val="FFFF00"/>
+                </a:highlight>
+              </a:rPr>
+              <a:t>01-Wading Trough The Crowds</a:t>
+            </a:r>
+          </a:p>
+          <a:p>
+            <a:pPr marL="0" indent="0">
+              <a:buNone/>
+            </a:pPr>
+            <a:r>
+              <a:rPr lang="en-US" altLang="zh-CN" dirty="0">
+                <a:highlight>
+                  <a:srgbClr val="00FFFF"/>
+                </a:highlight>
+              </a:rPr>
+              <a:t>02-Op. 39 : 1</a:t>
+            </a:r>
+          </a:p>
+          <a:p>
+            <a:pPr marL="0" indent="0">
+              <a:buNone/>
+            </a:pPr>
+            <a:r>
+              <a:rPr lang="en-US" altLang="zh-CN" dirty="0"/>
+              <a:t>03-Duvet</a:t>
+            </a:r>
+          </a:p>
+          <a:p>
+            <a:pPr marL="0" indent="0">
+              <a:buNone/>
+            </a:pPr>
+            <a:r>
+              <a:rPr lang="en-US" altLang="zh-CN" dirty="0">
+                <a:highlight>
+                  <a:srgbClr val="00FFFF"/>
+                </a:highlight>
+              </a:rPr>
+              <a:t>04-Op. 40,  No. 1</a:t>
+            </a:r>
+          </a:p>
+          <a:p>
+            <a:pPr marL="0" indent="0">
+              <a:buNone/>
+            </a:pPr>
+            <a:r>
+              <a:rPr lang="en-US" altLang="zh-CN" dirty="0">
+                <a:highlight>
+                  <a:srgbClr val="00FFFF"/>
+                </a:highlight>
+              </a:rPr>
+              <a:t>05-Op. 40,  No. 8</a:t>
+            </a:r>
+          </a:p>
+          <a:p>
+            <a:pPr marL="0" indent="0">
+              <a:buNone/>
+            </a:pPr>
+            <a:r>
+              <a:rPr lang="en-US" altLang="zh-CN" dirty="0"/>
+              <a:t>06- Mad World (Remix)</a:t>
+            </a:r>
+          </a:p>
+          <a:p>
+            <a:pPr marL="0" indent="0">
+              <a:buNone/>
+            </a:pPr>
+            <a:r>
+              <a:rPr lang="en-US" altLang="zh-CN" dirty="0"/>
+              <a:t>07-</a:t>
+            </a:r>
+            <a:r>
+              <a:rPr lang="ja-JP" altLang="en-US" dirty="0"/>
+              <a:t>ドルフィンみさき </a:t>
+            </a:r>
+            <a:r>
+              <a:rPr lang="en-US" altLang="ja-JP" dirty="0"/>
+              <a:t>- </a:t>
+            </a:r>
+            <a:r>
+              <a:rPr lang="ja-JP" altLang="en-US" dirty="0"/>
+              <a:t>地上</a:t>
+            </a:r>
+            <a:endParaRPr lang="en-US" altLang="ja-JP" dirty="0"/>
+          </a:p>
+          <a:p>
+            <a:pPr marL="0" indent="0">
+              <a:buNone/>
+            </a:pPr>
+            <a:r>
+              <a:rPr lang="en-US" altLang="zh-CN" dirty="0">
+                <a:highlight>
+                  <a:srgbClr val="00FFFF"/>
+                </a:highlight>
+              </a:rPr>
+              <a:t>08-M. 55 : 1</a:t>
+            </a:r>
+          </a:p>
+          <a:p>
+            <a:pPr marL="0" indent="0">
+              <a:buNone/>
+            </a:pPr>
+            <a:r>
+              <a:rPr lang="en-US" altLang="zh-CN" dirty="0"/>
+              <a:t>09-Meant To Be (Remix)</a:t>
+            </a:r>
+          </a:p>
+          <a:p>
+            <a:pPr marL="0" indent="0">
+              <a:buNone/>
+            </a:pPr>
+            <a:r>
+              <a:rPr lang="en-US" altLang="zh-CN" dirty="0"/>
+              <a:t>10-Loretta</a:t>
+            </a:r>
+          </a:p>
+          <a:p>
+            <a:endParaRPr lang="zh-CN" altLang="en-US" dirty="0"/>
+          </a:p>
+        </p:txBody>
+      </p:sp>
+      <p:pic>
+        <p:nvPicPr>
+          <p:cNvPr id="4" name="图片 3">
+            <a:extLst>
+              <a:ext uri="{FF2B5EF4-FFF2-40B4-BE49-F238E27FC236}">
+                <a16:creationId xmlns:a16="http://schemas.microsoft.com/office/drawing/2014/main" id="{95A3B700-5B17-4387-8F41-83FC9CA2AB0C}"/>
+              </a:ext>
+            </a:extLst>
+          </p:cNvPr>
+          <p:cNvPicPr>
+            <a:picLocks noChangeAspect="1"/>
+          </p:cNvPicPr>
+          <p:nvPr/>
+        </p:nvPicPr>
+        <p:blipFill>
+          <a:blip r:embed="rId2"/>
+          <a:stretch>
+            <a:fillRect/>
+          </a:stretch>
+        </p:blipFill>
+        <p:spPr>
+          <a:xfrm>
+            <a:off x="6653752" y="1102936"/>
+            <a:ext cx="5538248" cy="4652128"/>
+          </a:xfrm>
+          <a:prstGeom prst="rect">
+            <a:avLst/>
+          </a:prstGeom>
+        </p:spPr>
+      </p:pic>
+      <p:pic>
+        <p:nvPicPr>
+          <p:cNvPr id="5" name="图片 4">
+            <a:extLst>
+              <a:ext uri="{FF2B5EF4-FFF2-40B4-BE49-F238E27FC236}">
+                <a16:creationId xmlns:a16="http://schemas.microsoft.com/office/drawing/2014/main" id="{296A80ED-316A-4C76-989A-A71C15CEC4D5}"/>
+              </a:ext>
+            </a:extLst>
+          </p:cNvPr>
+          <p:cNvPicPr>
+            <a:picLocks noChangeAspect="1"/>
+          </p:cNvPicPr>
+          <p:nvPr/>
+        </p:nvPicPr>
+        <p:blipFill rotWithShape="1">
+          <a:blip r:embed="rId3"/>
+          <a:srcRect l="27617" t="-870" r="37927" b="34348"/>
+          <a:stretch/>
+        </p:blipFill>
+        <p:spPr>
+          <a:xfrm>
+            <a:off x="5573699" y="1199686"/>
+            <a:ext cx="1080053" cy="1251878"/>
+          </a:xfrm>
+          <a:prstGeom prst="rect">
+            <a:avLst/>
+          </a:prstGeom>
+        </p:spPr>
+      </p:pic>
+    </p:spTree>
+    <p:extLst>
+      <p:ext uri="{BB962C8B-B14F-4D97-AF65-F5344CB8AC3E}">
+        <p14:creationId xmlns:p14="http://schemas.microsoft.com/office/powerpoint/2010/main" val="3402901399"/>
+      </p:ext>
+    </p:extLst>
+  </p:cSld>
+  <p:clrMapOvr>
+    <a:masterClrMapping/>
+  </p:clrMapOvr>
+</p:sld>
+</file>
+
+<file path=ppt/slides/slide9.xml><?xml version="1.0" encoding="utf-8"?>
+<p:sld xmlns:a="http://schemas.openxmlformats.org/drawingml/2006/main" xmlns:r="http://schemas.openxmlformats.org/officeDocument/2006/relationships" xmlns:p="http://schemas.openxmlformats.org/presentationml/2006/main">
+  <p:cSld>
+    <p:spTree>
+      <p:nvGrpSpPr>
+        <p:cNvPr id="1" name="">
+          <a:extLst>
+            <a:ext uri="{FF2B5EF4-FFF2-40B4-BE49-F238E27FC236}">
+              <a16:creationId xmlns:a16="http://schemas.microsoft.com/office/drawing/2014/main" id="{41AD9585-4EE7-8C46-F329-2A59292A88B5}"/>
+            </a:ext>
+          </a:extLst>
+        </p:cNvPr>
+        <p:cNvGrpSpPr/>
+        <p:nvPr/>
+      </p:nvGrpSpPr>
+      <p:grpSpPr>
+        <a:xfrm>
+          <a:off x="0" y="0"/>
+          <a:ext cx="0" cy="0"/>
+          <a:chOff x="0" y="0"/>
+          <a:chExt cx="0" cy="0"/>
+        </a:xfrm>
+      </p:grpSpPr>
+      <p:sp>
+        <p:nvSpPr>
+          <p:cNvPr id="2" name="标题 1">
+            <a:extLst>
+              <a:ext uri="{FF2B5EF4-FFF2-40B4-BE49-F238E27FC236}">
+                <a16:creationId xmlns:a16="http://schemas.microsoft.com/office/drawing/2014/main" id="{BDA14F93-A15E-F68A-EB37-41FEE87F4DBD}"/>
+              </a:ext>
+            </a:extLst>
+          </p:cNvPr>
+          <p:cNvSpPr>
+            <a:spLocks noGrp="1"/>
+          </p:cNvSpPr>
+          <p:nvPr>
+            <p:ph type="title"/>
+          </p:nvPr>
+        </p:nvSpPr>
+        <p:spPr/>
+        <p:txBody>
+          <a:bodyPr/>
+          <a:lstStyle/>
+          <a:p>
+            <a:r>
+              <a:rPr lang="en-US" altLang="zh-CN" dirty="0"/>
+              <a:t>2025</a:t>
+            </a:r>
+            <a:r>
+              <a:rPr lang="zh-CN" altLang="en-US" dirty="0"/>
+              <a:t>年度歌单 </a:t>
+            </a:r>
+            <a:r>
+              <a:rPr lang="en-US" altLang="zh-CN" dirty="0"/>
+              <a:t>10/10</a:t>
+            </a:r>
+            <a:endParaRPr lang="zh-CN" altLang="en-US" dirty="0"/>
+          </a:p>
+        </p:txBody>
+      </p:sp>
+      <p:pic>
+        <p:nvPicPr>
+          <p:cNvPr id="5" name="图片 4">
+            <a:extLst>
+              <a:ext uri="{FF2B5EF4-FFF2-40B4-BE49-F238E27FC236}">
+                <a16:creationId xmlns:a16="http://schemas.microsoft.com/office/drawing/2014/main" id="{6752154C-C969-25EE-92FF-982A5F5F9DA4}"/>
+              </a:ext>
+            </a:extLst>
+          </p:cNvPr>
+          <p:cNvPicPr>
+            <a:picLocks noChangeAspect="1"/>
+          </p:cNvPicPr>
+          <p:nvPr/>
+        </p:nvPicPr>
+        <p:blipFill rotWithShape="1">
+          <a:blip r:embed="rId2"/>
+          <a:srcRect l="27617" t="-870" r="37927" b="34348"/>
+          <a:stretch/>
+        </p:blipFill>
+        <p:spPr>
+          <a:xfrm>
+            <a:off x="8268773" y="1825625"/>
+            <a:ext cx="1080053" cy="1251878"/>
+          </a:xfrm>
+          <a:prstGeom prst="rect">
+            <a:avLst/>
+          </a:prstGeom>
+        </p:spPr>
+      </p:pic>
+      <p:pic>
+        <p:nvPicPr>
+          <p:cNvPr id="7" name="图片 6" descr="图形用户界面, 文本, 应用程序, 电子邮件&#10;&#10;AI 生成的内容可能不正确。">
+            <a:extLst>
+              <a:ext uri="{FF2B5EF4-FFF2-40B4-BE49-F238E27FC236}">
+                <a16:creationId xmlns:a16="http://schemas.microsoft.com/office/drawing/2014/main" id="{AF172534-9763-CF1D-4CF0-5AA13BA5514D}"/>
+              </a:ext>
+            </a:extLst>
+          </p:cNvPr>
+          <p:cNvPicPr>
+            <a:picLocks noChangeAspect="1"/>
+          </p:cNvPicPr>
+          <p:nvPr/>
+        </p:nvPicPr>
+        <p:blipFill>
+          <a:blip r:embed="rId3">
+            <a:extLst>
+              <a:ext uri="{28A0092B-C50C-407E-A947-70E740481C1C}">
+                <a14:useLocalDpi xmlns:a14="http://schemas.microsoft.com/office/drawing/2010/main" val="0"/>
+              </a:ext>
+            </a:extLst>
+          </a:blip>
+          <a:srcRect r="49484"/>
+          <a:stretch>
+            <a:fillRect/>
+          </a:stretch>
+        </p:blipFill>
+        <p:spPr>
+          <a:xfrm>
+            <a:off x="7690810" y="-462"/>
+            <a:ext cx="4501190" cy="6858462"/>
+          </a:xfrm>
+          <a:prstGeom prst="rect">
+            <a:avLst/>
+          </a:prstGeom>
+        </p:spPr>
+      </p:pic>
+      <p:sp>
+        <p:nvSpPr>
+          <p:cNvPr id="3" name="内容占位符 2">
+            <a:extLst>
+              <a:ext uri="{FF2B5EF4-FFF2-40B4-BE49-F238E27FC236}">
+                <a16:creationId xmlns:a16="http://schemas.microsoft.com/office/drawing/2014/main" id="{D950820C-A7DC-C248-F775-6D5B2C13C2DF}"/>
+              </a:ext>
+            </a:extLst>
+          </p:cNvPr>
+          <p:cNvSpPr>
+            <a:spLocks noGrp="1"/>
+          </p:cNvSpPr>
+          <p:nvPr>
+            <p:ph idx="1"/>
+          </p:nvPr>
+        </p:nvSpPr>
+        <p:spPr/>
+        <p:txBody>
+          <a:bodyPr>
+            <a:normAutofit fontScale="92500" lnSpcReduction="20000"/>
+          </a:bodyPr>
+          <a:lstStyle/>
+          <a:p>
+            <a:pPr marL="0" indent="0">
+              <a:buNone/>
+            </a:pPr>
+            <a:r>
+              <a:rPr lang="en-US" altLang="zh-CN" dirty="0">
+                <a:highlight>
+                  <a:srgbClr val="00FFFF"/>
+                </a:highlight>
+              </a:rPr>
+              <a:t>01-</a:t>
+            </a:r>
+            <a:r>
+              <a:rPr lang="en" altLang="zh-CN" dirty="0">
+                <a:highlight>
+                  <a:srgbClr val="00FFFF"/>
+                </a:highlight>
+              </a:rPr>
+              <a:t>Violin Sonata in A Major,  FWV 8:II.</a:t>
+            </a:r>
+            <a:r>
+              <a:rPr lang="zh-CN" altLang="en-US" dirty="0">
+                <a:highlight>
+                  <a:srgbClr val="00FFFF"/>
+                </a:highlight>
+              </a:rPr>
+              <a:t> </a:t>
+            </a:r>
+            <a:r>
+              <a:rPr lang="en-US" altLang="zh-CN" dirty="0">
+                <a:highlight>
+                  <a:srgbClr val="00FFFF"/>
+                </a:highlight>
+              </a:rPr>
+              <a:t>Allegro</a:t>
+            </a:r>
+          </a:p>
+          <a:p>
+            <a:pPr marL="0" indent="0">
+              <a:buNone/>
+            </a:pPr>
+            <a:r>
+              <a:rPr lang="en-US" altLang="zh-CN" dirty="0"/>
+              <a:t>02-Overcompensate</a:t>
+            </a:r>
+          </a:p>
+          <a:p>
+            <a:pPr marL="0" indent="0">
+              <a:buNone/>
+            </a:pPr>
+            <a:r>
+              <a:rPr lang="en-US" altLang="zh-CN" dirty="0">
+                <a:highlight>
+                  <a:srgbClr val="00FFFF"/>
+                </a:highlight>
+              </a:rPr>
+              <a:t>03-Piano Sonata No. 4 in F-Sharp Major,  Op. 30</a:t>
+            </a:r>
+          </a:p>
+          <a:p>
+            <a:pPr marL="0" indent="0">
+              <a:buNone/>
+            </a:pPr>
+            <a:r>
+              <a:rPr lang="en-US" altLang="zh-CN" dirty="0">
+                <a:highlight>
+                  <a:srgbClr val="00FF00"/>
+                </a:highlight>
+              </a:rPr>
+              <a:t>04-Skycraping</a:t>
+            </a:r>
+          </a:p>
+          <a:p>
+            <a:pPr marL="0" indent="0">
+              <a:buNone/>
+            </a:pPr>
+            <a:r>
+              <a:rPr lang="en-US" altLang="zh-CN" dirty="0">
+                <a:highlight>
+                  <a:srgbClr val="00FF00"/>
+                </a:highlight>
+              </a:rPr>
+              <a:t>05-Wading</a:t>
+            </a:r>
+            <a:r>
+              <a:rPr lang="zh-CN" altLang="en-US" dirty="0">
+                <a:highlight>
+                  <a:srgbClr val="00FF00"/>
+                </a:highlight>
+              </a:rPr>
+              <a:t> </a:t>
+            </a:r>
+            <a:r>
+              <a:rPr lang="en-US" altLang="zh-CN" dirty="0">
+                <a:highlight>
+                  <a:srgbClr val="00FF00"/>
+                </a:highlight>
+              </a:rPr>
+              <a:t>Through</a:t>
+            </a:r>
+            <a:r>
+              <a:rPr lang="zh-CN" altLang="en-US" dirty="0">
+                <a:highlight>
+                  <a:srgbClr val="00FF00"/>
+                </a:highlight>
+              </a:rPr>
+              <a:t> </a:t>
+            </a:r>
+            <a:r>
+              <a:rPr lang="en-US" altLang="zh-CN" dirty="0">
+                <a:highlight>
+                  <a:srgbClr val="00FF00"/>
+                </a:highlight>
+              </a:rPr>
+              <a:t>The</a:t>
+            </a:r>
+            <a:r>
+              <a:rPr lang="zh-CN" altLang="en-US" dirty="0">
+                <a:highlight>
+                  <a:srgbClr val="00FF00"/>
+                </a:highlight>
+              </a:rPr>
+              <a:t> </a:t>
+            </a:r>
+            <a:r>
+              <a:rPr lang="en-US" altLang="zh-CN" dirty="0">
+                <a:highlight>
+                  <a:srgbClr val="00FF00"/>
+                </a:highlight>
+              </a:rPr>
+              <a:t>Crowds</a:t>
+            </a:r>
+            <a:r>
+              <a:rPr lang="zh-CN" altLang="en-US" dirty="0">
+                <a:highlight>
+                  <a:srgbClr val="00FF00"/>
+                </a:highlight>
+              </a:rPr>
+              <a:t> 蝉联</a:t>
+            </a:r>
+            <a:endParaRPr lang="en-US" altLang="zh-CN" dirty="0">
+              <a:highlight>
+                <a:srgbClr val="00FF00"/>
+              </a:highlight>
+            </a:endParaRPr>
+          </a:p>
+          <a:p>
+            <a:pPr marL="0" indent="0">
+              <a:buNone/>
+            </a:pPr>
+            <a:r>
+              <a:rPr lang="en-US" altLang="zh-CN" dirty="0">
+                <a:highlight>
+                  <a:srgbClr val="00FF00"/>
+                </a:highlight>
+              </a:rPr>
+              <a:t>06-Basic</a:t>
+            </a:r>
+            <a:r>
+              <a:rPr lang="zh-CN" altLang="en-US" dirty="0">
+                <a:highlight>
+                  <a:srgbClr val="00FF00"/>
+                </a:highlight>
+              </a:rPr>
+              <a:t> </a:t>
+            </a:r>
+            <a:r>
+              <a:rPr lang="en-US" altLang="zh-CN" dirty="0">
+                <a:highlight>
+                  <a:srgbClr val="00FF00"/>
+                </a:highlight>
+              </a:rPr>
+              <a:t>Instinct</a:t>
+            </a:r>
+          </a:p>
+          <a:p>
+            <a:pPr marL="0" indent="0">
+              <a:buNone/>
+            </a:pPr>
+            <a:r>
+              <a:rPr lang="en-US" altLang="zh-CN" dirty="0">
+                <a:highlight>
+                  <a:srgbClr val="00FFFF"/>
+                </a:highlight>
+              </a:rPr>
+              <a:t>07-Kreisleriana,  Op. 16:IV. Sehr </a:t>
+            </a:r>
+            <a:r>
+              <a:rPr lang="en-US" altLang="zh-CN" dirty="0" err="1">
+                <a:highlight>
+                  <a:srgbClr val="00FFFF"/>
+                </a:highlight>
+              </a:rPr>
+              <a:t>langsam</a:t>
+            </a:r>
+            <a:endParaRPr lang="en-US" altLang="zh-CN" dirty="0">
+              <a:highlight>
+                <a:srgbClr val="00FFFF"/>
+              </a:highlight>
+            </a:endParaRPr>
+          </a:p>
+          <a:p>
+            <a:pPr marL="0" indent="0">
+              <a:buNone/>
+            </a:pPr>
+            <a:r>
+              <a:rPr lang="en-US" altLang="zh-CN" dirty="0"/>
+              <a:t>08-</a:t>
+            </a:r>
+            <a:r>
+              <a:rPr lang="zh-CN" altLang="en-US" dirty="0"/>
+              <a:t>魔镜</a:t>
+            </a:r>
+            <a:endParaRPr lang="en-US" altLang="zh-CN" dirty="0"/>
+          </a:p>
+          <a:p>
+            <a:pPr marL="0" indent="0">
+              <a:buNone/>
+            </a:pPr>
+            <a:r>
+              <a:rPr lang="en-US" altLang="zh-CN" dirty="0">
+                <a:highlight>
+                  <a:srgbClr val="FFFF00"/>
+                </a:highlight>
+              </a:rPr>
+              <a:t>09-</a:t>
+            </a:r>
+            <a:r>
+              <a:rPr lang="ja-JP" altLang="en-US" dirty="0">
+                <a:highlight>
+                  <a:srgbClr val="FFFF00"/>
+                </a:highlight>
+              </a:rPr>
+              <a:t>ドルフィンみさき </a:t>
+            </a:r>
+            <a:r>
+              <a:rPr lang="en-US" altLang="ja-JP" dirty="0">
+                <a:highlight>
+                  <a:srgbClr val="FFFF00"/>
+                </a:highlight>
+              </a:rPr>
+              <a:t>- </a:t>
+            </a:r>
+            <a:r>
+              <a:rPr lang="ja-JP" altLang="en-US">
+                <a:highlight>
+                  <a:srgbClr val="FFFF00"/>
+                </a:highlight>
+              </a:rPr>
+              <a:t>地上</a:t>
+            </a:r>
+            <a:r>
+              <a:rPr lang="zh-CN" altLang="en-US" dirty="0">
+                <a:highlight>
+                  <a:srgbClr val="FFFF00"/>
+                </a:highlight>
+              </a:rPr>
+              <a:t> 蝉联</a:t>
+            </a:r>
+            <a:endParaRPr lang="en-US" altLang="ja-JP" dirty="0">
+              <a:highlight>
+                <a:srgbClr val="FFFF00"/>
+              </a:highlight>
+            </a:endParaRPr>
+          </a:p>
+          <a:p>
+            <a:pPr marL="0" indent="0">
+              <a:buNone/>
+            </a:pPr>
+            <a:r>
+              <a:rPr lang="en-US" altLang="zh-CN" dirty="0">
+                <a:highlight>
+                  <a:srgbClr val="00FF00"/>
+                </a:highlight>
+              </a:rPr>
+              <a:t>10-Caffeine</a:t>
+            </a:r>
+            <a:endParaRPr lang="zh-CN" altLang="en-US" dirty="0">
+              <a:highlight>
+                <a:srgbClr val="00FF00"/>
+              </a:highlight>
+            </a:endParaRPr>
+          </a:p>
+        </p:txBody>
+      </p:sp>
+      <p:pic>
+        <p:nvPicPr>
+          <p:cNvPr id="9" name="图片 8">
+            <a:extLst>
+              <a:ext uri="{FF2B5EF4-FFF2-40B4-BE49-F238E27FC236}">
+                <a16:creationId xmlns:a16="http://schemas.microsoft.com/office/drawing/2014/main" id="{154EF1BF-9434-BE1F-6CF1-2FE333E553E7}"/>
+              </a:ext>
+            </a:extLst>
+          </p:cNvPr>
+          <p:cNvPicPr>
+            <a:picLocks noChangeAspect="1"/>
+          </p:cNvPicPr>
+          <p:nvPr/>
+        </p:nvPicPr>
+        <p:blipFill rotWithShape="1">
+          <a:blip r:embed="rId2"/>
+          <a:srcRect l="27617" t="-870" r="37927" b="34348"/>
+          <a:stretch/>
+        </p:blipFill>
+        <p:spPr>
+          <a:xfrm>
+            <a:off x="6096000" y="4639665"/>
+            <a:ext cx="1080053" cy="1251878"/>
+          </a:xfrm>
+          <a:prstGeom prst="rect">
+            <a:avLst/>
+          </a:prstGeom>
+        </p:spPr>
+      </p:pic>
+    </p:spTree>
+    <p:extLst>
+      <p:ext uri="{BB962C8B-B14F-4D97-AF65-F5344CB8AC3E}">
+        <p14:creationId xmlns:p14="http://schemas.microsoft.com/office/powerpoint/2010/main" val="2992684989"/>
       </p:ext>
     </p:extLst>
   </p:cSld>
